--- a/Bachelier_Kevin_SintaZaranie.pptx
+++ b/Bachelier_Kevin_SintaZaranie.pptx
@@ -295,7 +295,7 @@
       </p15:sldGuideLst>
     </p:ext>
     <p:ext uri="GoogleSlidesCustomDataVersion2">
-      <go:slidesCustomData xmlns:go="http://customooxmlschemas.google.com/" xmlns:ahyp="http://schemas.microsoft.com/office/drawing/2018/hyperlinkcolor" xmlns:p15="http://schemas.microsoft.com/office/powerpoint/2012/main" xmlns:p14="http://schemas.microsoft.com/office/powerpoint/2010/main" xmlns:com="http://schemas.openxmlformats.org/drawingml/2006/compatibility" xmlns:pvml="urn:schemas-microsoft-com:office:powerpoint" xmlns:v="urn:schemas-microsoft-com:vml" xmlns:o="urn:schemas-microsoft-com:office:office" xmlns:dgm="http://schemas.openxmlformats.org/drawingml/2006/diagram" xmlns:c="http://schemas.openxmlformats.org/drawingml/2006/chart" xmlns:mv="urn:schemas-microsoft-com:mac:vml" xmlns:mc="http://schemas.openxmlformats.org/markup-compatibility/2006" xmlns="" r:id="rId31" roundtripDataSignature="AMtx7mjvIUtGSNpVopzYnf23dxEsE/fdMA=="/>
+      <go:slidesCustomData xmlns="" xmlns:mc="http://schemas.openxmlformats.org/markup-compatibility/2006" xmlns:mv="urn:schemas-microsoft-com:mac:vml" xmlns:c="http://schemas.openxmlformats.org/drawingml/2006/chart" xmlns:dgm="http://schemas.openxmlformats.org/drawingml/2006/diagram" xmlns:o="urn:schemas-microsoft-com:office:office" xmlns:v="urn:schemas-microsoft-com:vml" xmlns:pvml="urn:schemas-microsoft-com:office:powerpoint" xmlns:com="http://schemas.openxmlformats.org/drawingml/2006/compatibility" xmlns:p14="http://schemas.microsoft.com/office/powerpoint/2010/main" xmlns:p15="http://schemas.microsoft.com/office/powerpoint/2012/main" xmlns:ahyp="http://schemas.microsoft.com/office/drawing/2018/hyperlinkcolor" xmlns:go="http://customooxmlschemas.google.com/" r:id="rId31" roundtripDataSignature="AMtx7mjvIUtGSNpVopzYnf23dxEsE/fdMA=="/>
     </p:ext>
   </p:extLst>
 </p:presentation>
@@ -10844,6 +10844,14 @@
 <file path=ppt/slides/slide10.xml><?xml version="1.0" encoding="utf-8"?>
 <p:sld xmlns:a="http://schemas.openxmlformats.org/drawingml/2006/main" xmlns:r="http://schemas.openxmlformats.org/officeDocument/2006/relationships" xmlns:p="http://schemas.openxmlformats.org/presentationml/2006/main">
   <p:cSld>
+    <p:bg>
+      <p:bgPr>
+        <a:solidFill>
+          <a:srgbClr val="3A8EF4"/>
+        </a:solidFill>
+        <a:effectLst/>
+      </p:bgPr>
+    </p:bg>
     <p:spTree>
       <p:nvGrpSpPr>
         <p:cNvPr id="1" name="Shape 109"/>
@@ -10901,10 +10909,18 @@
               <a:buNone/>
             </a:pPr>
             <a:r>
-              <a:rPr lang="en-GB"/>
+              <a:rPr lang="en-GB" dirty="0">
+                <a:solidFill>
+                  <a:schemeClr val="bg1"/>
+                </a:solidFill>
+              </a:rPr>
               <a:t>Main features</a:t>
             </a:r>
-            <a:endParaRPr/>
+            <a:endParaRPr dirty="0">
+              <a:solidFill>
+                <a:schemeClr val="bg1"/>
+              </a:solidFill>
+            </a:endParaRPr>
           </a:p>
         </p:txBody>
       </p:sp>
@@ -10937,7 +10953,7 @@
           </a:bodyPr>
           <a:lstStyle/>
           <a:p>
-            <a:pPr marL="457200" lvl="0" indent="-342900" algn="l" rtl="0">
+            <a:pPr marL="114300" lvl="0" indent="0" algn="l" rtl="0">
               <a:lnSpc>
                 <a:spcPct val="115000"/>
               </a:lnSpc>
@@ -10948,57 +10964,29 @@
                 <a:spcPts val="0"/>
               </a:spcAft>
               <a:buSzPts val="1800"/>
-              <a:buChar char="●"/>
+              <a:buNone/>
             </a:pPr>
             <a:r>
-              <a:rPr lang="en-GB" dirty="0" err="1"/>
-              <a:t>Systèmes</a:t>
-            </a:r>
-            <a:r>
-              <a:rPr lang="en-GB" dirty="0"/>
-              <a:t> </a:t>
-            </a:r>
-            <a:r>
-              <a:rPr lang="en-GB" dirty="0" err="1"/>
-              <a:t>nécessaires</a:t>
-            </a:r>
-            <a:r>
-              <a:rPr lang="en-GB" dirty="0"/>
-              <a:t> à </a:t>
-            </a:r>
-            <a:r>
-              <a:rPr lang="en-GB" dirty="0" err="1"/>
-              <a:t>ce</a:t>
-            </a:r>
-            <a:r>
-              <a:rPr lang="en-GB" dirty="0"/>
-              <a:t> que je </a:t>
-            </a:r>
-            <a:r>
-              <a:rPr lang="en-GB" dirty="0" err="1"/>
-              <a:t>puisse</a:t>
-            </a:r>
-            <a:r>
-              <a:rPr lang="en-GB" dirty="0"/>
-              <a:t> </a:t>
-            </a:r>
-            <a:r>
-              <a:rPr lang="en-GB" dirty="0" err="1"/>
-              <a:t>remplir</a:t>
-            </a:r>
-            <a:r>
-              <a:rPr lang="en-GB" dirty="0"/>
-              <a:t> les action de </a:t>
-            </a:r>
-            <a:r>
-              <a:rPr lang="en-GB" dirty="0" err="1"/>
-              <a:t>mes</a:t>
-            </a:r>
-            <a:r>
-              <a:rPr lang="en-GB" dirty="0"/>
-              <a:t> game loops</a:t>
-            </a:r>
-            <a:endParaRPr dirty="0"/>
+              <a:rPr lang="fr-FR" b="1" dirty="0">
+                <a:solidFill>
+                  <a:schemeClr val="bg1"/>
+                </a:solidFill>
+              </a:rPr>
+              <a:t>Système de ramassage du </a:t>
+            </a:r>
+            <a:r>
+              <a:rPr lang="fr-FR" b="1" dirty="0" err="1">
+                <a:solidFill>
+                  <a:schemeClr val="bg1"/>
+                </a:solidFill>
+              </a:rPr>
+              <a:t>loot</a:t>
+            </a:r>
+            <a:endParaRPr b="1" dirty="0">
+              <a:solidFill>
+                <a:schemeClr val="bg1"/>
+              </a:solidFill>
+            </a:endParaRPr>
           </a:p>
           <a:p>
             <a:pPr marL="914400" lvl="1" indent="-317500" algn="l" rtl="0">
@@ -11015,18 +11003,53 @@
               <a:buChar char="○"/>
             </a:pPr>
             <a:r>
-              <a:rPr lang="en-GB" dirty="0"/>
-              <a:t>Minimum de 4 </a:t>
-            </a:r>
-            <a:r>
-              <a:rPr lang="en-GB" dirty="0" err="1"/>
-              <a:t>systèmes</a:t>
-            </a:r>
-            <a:r>
-              <a:rPr lang="en-GB" dirty="0"/>
-              <a:t> (Ex: Navigation, Combat, etc)</a:t>
-            </a:r>
-            <a:endParaRPr dirty="0"/>
+              <a:rPr lang="fr-FR" b="1" dirty="0">
+                <a:solidFill>
+                  <a:schemeClr val="bg1"/>
+                </a:solidFill>
+              </a:rPr>
+              <a:t>Simple </a:t>
+            </a:r>
+            <a:r>
+              <a:rPr lang="fr-FR" b="1" dirty="0" err="1">
+                <a:solidFill>
+                  <a:schemeClr val="bg1"/>
+                </a:solidFill>
+              </a:rPr>
+              <a:t>interact</a:t>
+            </a:r>
+            <a:r>
+              <a:rPr lang="fr-FR" b="1" dirty="0">
+                <a:solidFill>
+                  <a:schemeClr val="bg1"/>
+                </a:solidFill>
+              </a:rPr>
+              <a:t> </a:t>
+            </a:r>
+            <a:r>
+              <a:rPr lang="fr-FR" dirty="0">
+                <a:solidFill>
+                  <a:schemeClr val="bg1"/>
+                </a:solidFill>
+              </a:rPr>
+              <a:t>: un input qui permet de ramasser du </a:t>
+            </a:r>
+            <a:r>
+              <a:rPr lang="fr-FR" dirty="0" err="1">
+                <a:solidFill>
+                  <a:schemeClr val="bg1"/>
+                </a:solidFill>
+              </a:rPr>
+              <a:t>loot</a:t>
+            </a:r>
+            <a:r>
+              <a:rPr lang="fr-FR" dirty="0">
+                <a:solidFill>
+                  <a:schemeClr val="bg1"/>
+                </a:solidFill>
+              </a:rPr>
+              <a:t> (possible pour les petits items)</a:t>
+            </a:r>
           </a:p>
           <a:p>
             <a:pPr marL="914400" lvl="1" indent="-317500" algn="l" rtl="0">
@@ -11043,50 +11066,65 @@
               <a:buChar char="○"/>
             </a:pPr>
             <a:r>
-              <a:rPr lang="en-GB" dirty="0"/>
-              <a:t>Avec au </a:t>
-            </a:r>
-            <a:r>
-              <a:rPr lang="en-GB" dirty="0" err="1"/>
-              <a:t>moins</a:t>
-            </a:r>
-            <a:r>
-              <a:rPr lang="en-GB" dirty="0"/>
-              <a:t> 2 </a:t>
-            </a:r>
-            <a:r>
-              <a:rPr lang="en-GB" dirty="0" err="1"/>
-              <a:t>mécaniques</a:t>
-            </a:r>
-            <a:r>
-              <a:rPr lang="en-GB" dirty="0"/>
-              <a:t> par </a:t>
-            </a:r>
-            <a:r>
-              <a:rPr lang="en-GB" dirty="0" err="1"/>
-              <a:t>système</a:t>
-            </a:r>
-            <a:r>
-              <a:rPr lang="en-GB" dirty="0"/>
-              <a:t> (Ex: </a:t>
-            </a:r>
-            <a:r>
-              <a:rPr lang="en-GB" dirty="0" err="1"/>
-              <a:t>Courir</a:t>
-            </a:r>
-            <a:r>
-              <a:rPr lang="en-GB" dirty="0"/>
-              <a:t>, </a:t>
-            </a:r>
-            <a:r>
-              <a:rPr lang="en-GB" dirty="0" err="1"/>
-              <a:t>frapper</a:t>
-            </a:r>
-            <a:r>
-              <a:rPr lang="en-GB" dirty="0"/>
-              <a:t>, etc)</a:t>
-            </a:r>
-            <a:endParaRPr dirty="0"/>
+              <a:rPr lang="fr-FR" b="1" dirty="0" err="1">
+                <a:solidFill>
+                  <a:schemeClr val="bg1"/>
+                </a:solidFill>
+              </a:rPr>
+              <a:t>Interact</a:t>
+            </a:r>
+            <a:r>
+              <a:rPr lang="fr-FR" b="1" dirty="0">
+                <a:solidFill>
+                  <a:schemeClr val="bg1"/>
+                </a:solidFill>
+              </a:rPr>
+              <a:t> spam </a:t>
+            </a:r>
+            <a:r>
+              <a:rPr lang="fr-FR" dirty="0">
+                <a:solidFill>
+                  <a:schemeClr val="bg1"/>
+                </a:solidFill>
+              </a:rPr>
+              <a:t>: demande d’appuyer x fois sur le bouton dans le délai requis pour sortir un gros item de la vase</a:t>
+            </a:r>
+          </a:p>
+          <a:p>
+            <a:pPr marL="914400" lvl="1" indent="-317500" algn="l" rtl="0">
+              <a:lnSpc>
+                <a:spcPct val="115000"/>
+              </a:lnSpc>
+              <a:spcBef>
+                <a:spcPts val="0"/>
+              </a:spcBef>
+              <a:spcAft>
+                <a:spcPts val="0"/>
+              </a:spcAft>
+              <a:buSzPts val="1400"/>
+              <a:buChar char="○"/>
+            </a:pPr>
+            <a:r>
+              <a:rPr lang="fr-FR" b="1" dirty="0">
+                <a:solidFill>
+                  <a:schemeClr val="bg1"/>
+                </a:solidFill>
+              </a:rPr>
+              <a:t>Hold</a:t>
+            </a:r>
+            <a:r>
+              <a:rPr lang="fr-FR" dirty="0">
+                <a:solidFill>
+                  <a:schemeClr val="bg1"/>
+                </a:solidFill>
+              </a:rPr>
+              <a:t> : permet de gratter la vase pour voir si un objet est dedans. </a:t>
+            </a:r>
+            <a:endParaRPr dirty="0">
+              <a:solidFill>
+                <a:schemeClr val="bg1"/>
+              </a:solidFill>
+            </a:endParaRPr>
           </a:p>
         </p:txBody>
       </p:sp>
@@ -16975,6 +17013,14 @@
 <file path=ppt/slides/slide8.xml><?xml version="1.0" encoding="utf-8"?>
 <p:sld xmlns:a="http://schemas.openxmlformats.org/drawingml/2006/main" xmlns:r="http://schemas.openxmlformats.org/officeDocument/2006/relationships" xmlns:p="http://schemas.openxmlformats.org/presentationml/2006/main">
   <p:cSld>
+    <p:bg>
+      <p:bgPr>
+        <a:solidFill>
+          <a:srgbClr val="3A8EF4"/>
+        </a:solidFill>
+        <a:effectLst/>
+      </p:bgPr>
+    </p:bg>
     <p:spTree>
       <p:nvGrpSpPr>
         <p:cNvPr id="1" name="Shape 109"/>
@@ -17032,10 +17078,18 @@
               <a:buNone/>
             </a:pPr>
             <a:r>
-              <a:rPr lang="en-GB"/>
+              <a:rPr lang="en-GB" dirty="0">
+                <a:solidFill>
+                  <a:schemeClr val="bg1"/>
+                </a:solidFill>
+              </a:rPr>
               <a:t>Main features</a:t>
             </a:r>
-            <a:endParaRPr/>
+            <a:endParaRPr dirty="0">
+              <a:solidFill>
+                <a:schemeClr val="bg1"/>
+              </a:solidFill>
+            </a:endParaRPr>
           </a:p>
         </p:txBody>
       </p:sp>
@@ -17068,7 +17122,7 @@
           </a:bodyPr>
           <a:lstStyle/>
           <a:p>
-            <a:pPr marL="457200" lvl="0" indent="-342900" algn="l" rtl="0">
+            <a:pPr marL="114300" lvl="0" indent="0" algn="l" rtl="0">
               <a:lnSpc>
                 <a:spcPct val="115000"/>
               </a:lnSpc>
@@ -17078,12 +17132,103 @@
               <a:spcAft>
                 <a:spcPts val="0"/>
               </a:spcAft>
+              <a:buSzPts val="1800"/>
+              <a:buNone/>
+            </a:pPr>
+            <a:r>
+              <a:rPr lang="fr-FR" b="1" dirty="0">
+                <a:solidFill>
+                  <a:schemeClr val="bg1"/>
+                </a:solidFill>
+              </a:rPr>
+              <a:t>Système de planification (Interface)</a:t>
+            </a:r>
+          </a:p>
+          <a:p>
+            <a:pPr lvl="1" indent="-342900">
+              <a:spcBef>
+                <a:spcPts val="0"/>
+              </a:spcBef>
               <a:buSzPts val="1800"/>
               <a:buChar char="●"/>
             </a:pPr>
             <a:r>
-              <a:rPr lang="fr-FR" dirty="0"/>
-              <a:t>Système de planification </a:t>
+              <a:rPr lang="fr-FR" dirty="0">
+                <a:solidFill>
+                  <a:schemeClr val="bg1"/>
+                </a:solidFill>
+              </a:rPr>
+              <a:t>Chaque matin/début de journée, le joueur doit planifier son heure de plongée en fonction de la drague qui passe dans le chenal. Selon la plage horaire choisie : </a:t>
+            </a:r>
+          </a:p>
+          <a:p>
+            <a:pPr lvl="2" indent="-342900">
+              <a:spcBef>
+                <a:spcPts val="0"/>
+              </a:spcBef>
+              <a:buSzPts val="1800"/>
+              <a:buFont typeface="Arial" panose="020B0604020202020204" pitchFamily="34" charset="0"/>
+              <a:buChar char="•"/>
+            </a:pPr>
+            <a:r>
+              <a:rPr lang="fr-FR" dirty="0">
+                <a:solidFill>
+                  <a:schemeClr val="bg1"/>
+                </a:solidFill>
+              </a:rPr>
+              <a:t>Drague vient de passer : Fosse plus large (navigation plus facile) mais moins de trésors</a:t>
+            </a:r>
+          </a:p>
+          <a:p>
+            <a:pPr lvl="2" indent="-342900">
+              <a:spcBef>
+                <a:spcPts val="0"/>
+              </a:spcBef>
+              <a:buSzPts val="1800"/>
+              <a:buFont typeface="Arial" panose="020B0604020202020204" pitchFamily="34" charset="0"/>
+              <a:buChar char="•"/>
+            </a:pPr>
+            <a:r>
+              <a:rPr lang="fr-FR" dirty="0">
+                <a:solidFill>
+                  <a:schemeClr val="bg1"/>
+                </a:solidFill>
+              </a:rPr>
+              <a:t>Drague est passé il y a 12h et moins : Fosse plus étroite et fréquence des trésors normale</a:t>
+            </a:r>
+          </a:p>
+          <a:p>
+            <a:pPr lvl="2" indent="-342900">
+              <a:spcBef>
+                <a:spcPts val="0"/>
+              </a:spcBef>
+              <a:buSzPts val="1800"/>
+              <a:buFont typeface="Arial" panose="020B0604020202020204" pitchFamily="34" charset="0"/>
+              <a:buChar char="•"/>
+            </a:pPr>
+            <a:r>
+              <a:rPr lang="fr-FR" dirty="0">
+                <a:solidFill>
+                  <a:schemeClr val="bg1"/>
+                </a:solidFill>
+              </a:rPr>
+              <a:t>Drague est passé il y a plus de 12h : Fosse dangereuse et beaucoup de </a:t>
+            </a:r>
+            <a:r>
+              <a:rPr lang="fr-FR" dirty="0" err="1">
+                <a:solidFill>
+                  <a:schemeClr val="bg1"/>
+                </a:solidFill>
+              </a:rPr>
+              <a:t>loots</a:t>
+            </a:r>
+            <a:r>
+              <a:rPr lang="fr-FR" dirty="0">
+                <a:solidFill>
+                  <a:schemeClr val="bg1"/>
+                </a:solidFill>
+              </a:rPr>
+              <a:t>. </a:t>
             </a:r>
           </a:p>
           <a:p>
@@ -17094,24 +17239,11 @@
               <a:buSzPts val="1800"/>
               <a:buChar char="●"/>
             </a:pPr>
-            <a:r>
-              <a:rPr lang="fr-FR" dirty="0"/>
-              <a:t>Chaque matin/début de journée, le joueur doit planifier son heure de plongée en fonction de la drague qui passe dans </a:t>
-            </a:r>
-            <a:r>
-              <a:rPr lang="fr-FR"/>
-              <a:t>le chenal. </a:t>
-            </a:r>
-          </a:p>
-          <a:p>
-            <a:pPr lvl="1" indent="-342900">
-              <a:spcBef>
-                <a:spcPts val="0"/>
-              </a:spcBef>
-              <a:buSzPts val="1800"/>
-              <a:buChar char="●"/>
-            </a:pPr>
-            <a:endParaRPr dirty="0"/>
+            <a:endParaRPr dirty="0">
+              <a:solidFill>
+                <a:schemeClr val="bg1"/>
+              </a:solidFill>
+            </a:endParaRPr>
           </a:p>
           <a:p>
             <a:pPr marL="914400" lvl="1" indent="-317500" algn="l" rtl="0">
@@ -17128,18 +17260,26 @@
               <a:buChar char="○"/>
             </a:pPr>
             <a:r>
-              <a:rPr lang="en-GB" dirty="0"/>
-              <a:t>Minimum de 4 </a:t>
-            </a:r>
-            <a:r>
-              <a:rPr lang="en-GB" dirty="0" err="1"/>
-              <a:t>systèmes</a:t>
-            </a:r>
-            <a:r>
-              <a:rPr lang="en-GB" dirty="0"/>
-              <a:t> (Ex: Navigation, Combat, etc)</a:t>
-            </a:r>
-            <a:endParaRPr dirty="0"/>
+              <a:rPr lang="fr-FR" b="1" dirty="0">
+                <a:solidFill>
+                  <a:schemeClr val="bg1"/>
+                </a:solidFill>
+              </a:rPr>
+              <a:t>Analyser</a:t>
+            </a:r>
+            <a:r>
+              <a:rPr lang="fr-FR" dirty="0">
+                <a:solidFill>
+                  <a:schemeClr val="bg1"/>
+                </a:solidFill>
+              </a:rPr>
+              <a:t> les données de la veille, voire l’avant-veille selon les upgrades achetées.</a:t>
+            </a:r>
+            <a:endParaRPr dirty="0">
+              <a:solidFill>
+                <a:schemeClr val="bg1"/>
+              </a:solidFill>
+            </a:endParaRPr>
           </a:p>
           <a:p>
             <a:pPr marL="914400" lvl="1" indent="-317500" algn="l" rtl="0">
@@ -17156,50 +17296,50 @@
               <a:buChar char="○"/>
             </a:pPr>
             <a:r>
-              <a:rPr lang="en-GB" dirty="0"/>
-              <a:t>Avec au </a:t>
-            </a:r>
-            <a:r>
-              <a:rPr lang="en-GB" dirty="0" err="1"/>
-              <a:t>moins</a:t>
-            </a:r>
-            <a:r>
-              <a:rPr lang="en-GB" dirty="0"/>
-              <a:t> 2 </a:t>
-            </a:r>
-            <a:r>
-              <a:rPr lang="en-GB" dirty="0" err="1"/>
-              <a:t>mécaniques</a:t>
-            </a:r>
-            <a:r>
-              <a:rPr lang="en-GB" dirty="0"/>
-              <a:t> par </a:t>
-            </a:r>
-            <a:r>
-              <a:rPr lang="en-GB" dirty="0" err="1"/>
-              <a:t>système</a:t>
-            </a:r>
-            <a:r>
-              <a:rPr lang="en-GB" dirty="0"/>
-              <a:t> (Ex: </a:t>
-            </a:r>
-            <a:r>
-              <a:rPr lang="en-GB" dirty="0" err="1"/>
-              <a:t>Courir</a:t>
-            </a:r>
-            <a:r>
-              <a:rPr lang="en-GB" dirty="0"/>
-              <a:t>, </a:t>
-            </a:r>
-            <a:r>
-              <a:rPr lang="en-GB" dirty="0" err="1"/>
-              <a:t>frapper</a:t>
-            </a:r>
-            <a:r>
-              <a:rPr lang="en-GB" dirty="0"/>
-              <a:t>, etc)</a:t>
-            </a:r>
-            <a:endParaRPr dirty="0"/>
+              <a:rPr lang="en-GB" b="1" dirty="0" err="1">
+                <a:solidFill>
+                  <a:schemeClr val="bg1"/>
+                </a:solidFill>
+              </a:rPr>
+              <a:t>Sélectionner</a:t>
+            </a:r>
+            <a:r>
+              <a:rPr lang="en-GB" dirty="0">
+                <a:solidFill>
+                  <a:schemeClr val="bg1"/>
+                </a:solidFill>
+              </a:rPr>
+              <a:t> la plage </a:t>
+            </a:r>
+            <a:r>
+              <a:rPr lang="en-GB" dirty="0" err="1">
+                <a:solidFill>
+                  <a:schemeClr val="bg1"/>
+                </a:solidFill>
+              </a:rPr>
+              <a:t>horaire</a:t>
+            </a:r>
+            <a:r>
+              <a:rPr lang="en-GB" dirty="0">
+                <a:solidFill>
+                  <a:schemeClr val="bg1"/>
+                </a:solidFill>
+              </a:rPr>
+              <a:t> de </a:t>
+            </a:r>
+            <a:r>
+              <a:rPr lang="en-GB" dirty="0" err="1">
+                <a:solidFill>
+                  <a:schemeClr val="bg1"/>
+                </a:solidFill>
+              </a:rPr>
+              <a:t>plongée</a:t>
+            </a:r>
+            <a:endParaRPr dirty="0">
+              <a:solidFill>
+                <a:schemeClr val="bg1"/>
+              </a:solidFill>
+            </a:endParaRPr>
           </a:p>
         </p:txBody>
       </p:sp>
@@ -17214,6 +17354,14 @@
 <file path=ppt/slides/slide9.xml><?xml version="1.0" encoding="utf-8"?>
 <p:sld xmlns:a="http://schemas.openxmlformats.org/drawingml/2006/main" xmlns:r="http://schemas.openxmlformats.org/officeDocument/2006/relationships" xmlns:p="http://schemas.openxmlformats.org/presentationml/2006/main">
   <p:cSld>
+    <p:bg>
+      <p:bgPr>
+        <a:solidFill>
+          <a:srgbClr val="3A8EF4"/>
+        </a:solidFill>
+        <a:effectLst/>
+      </p:bgPr>
+    </p:bg>
     <p:spTree>
       <p:nvGrpSpPr>
         <p:cNvPr id="1" name="Shape 109"/>
@@ -17271,10 +17419,18 @@
               <a:buNone/>
             </a:pPr>
             <a:r>
-              <a:rPr lang="en-GB"/>
+              <a:rPr lang="en-GB" dirty="0">
+                <a:solidFill>
+                  <a:schemeClr val="bg1"/>
+                </a:solidFill>
+              </a:rPr>
               <a:t>Main features</a:t>
             </a:r>
-            <a:endParaRPr/>
+            <a:endParaRPr dirty="0">
+              <a:solidFill>
+                <a:schemeClr val="bg1"/>
+              </a:solidFill>
+            </a:endParaRPr>
           </a:p>
         </p:txBody>
       </p:sp>
@@ -17307,7 +17463,7 @@
           </a:bodyPr>
           <a:lstStyle/>
           <a:p>
-            <a:pPr marL="457200" lvl="0" indent="-342900" algn="l" rtl="0">
+            <a:pPr marL="114300" lvl="0" indent="0" algn="l" rtl="0">
               <a:lnSpc>
                 <a:spcPct val="115000"/>
               </a:lnSpc>
@@ -17318,57 +17474,21 @@
                 <a:spcPts val="0"/>
               </a:spcAft>
               <a:buSzPts val="1800"/>
-              <a:buChar char="●"/>
+              <a:buNone/>
             </a:pPr>
             <a:r>
-              <a:rPr lang="en-GB" dirty="0" err="1"/>
-              <a:t>Systèmes</a:t>
-            </a:r>
-            <a:r>
-              <a:rPr lang="en-GB" dirty="0"/>
-              <a:t> </a:t>
-            </a:r>
-            <a:r>
-              <a:rPr lang="en-GB" dirty="0" err="1"/>
-              <a:t>nécessaires</a:t>
-            </a:r>
-            <a:r>
-              <a:rPr lang="en-GB" dirty="0"/>
-              <a:t> à </a:t>
-            </a:r>
-            <a:r>
-              <a:rPr lang="en-GB" dirty="0" err="1"/>
-              <a:t>ce</a:t>
-            </a:r>
-            <a:r>
-              <a:rPr lang="en-GB" dirty="0"/>
-              <a:t> que je </a:t>
-            </a:r>
-            <a:r>
-              <a:rPr lang="en-GB" dirty="0" err="1"/>
-              <a:t>puisse</a:t>
-            </a:r>
-            <a:r>
-              <a:rPr lang="en-GB" dirty="0"/>
-              <a:t> </a:t>
-            </a:r>
-            <a:r>
-              <a:rPr lang="en-GB" dirty="0" err="1"/>
-              <a:t>remplir</a:t>
-            </a:r>
-            <a:r>
-              <a:rPr lang="en-GB" dirty="0"/>
-              <a:t> les action de </a:t>
-            </a:r>
-            <a:r>
-              <a:rPr lang="en-GB" dirty="0" err="1"/>
-              <a:t>mes</a:t>
-            </a:r>
-            <a:r>
-              <a:rPr lang="en-GB" dirty="0"/>
-              <a:t> game loops</a:t>
-            </a:r>
-            <a:endParaRPr dirty="0"/>
+              <a:rPr lang="fr-FR" b="1" dirty="0">
+                <a:solidFill>
+                  <a:schemeClr val="bg1"/>
+                </a:solidFill>
+              </a:rPr>
+              <a:t>Système de navigation de plongée</a:t>
+            </a:r>
+            <a:endParaRPr b="1" dirty="0">
+              <a:solidFill>
+                <a:schemeClr val="bg1"/>
+              </a:solidFill>
+            </a:endParaRPr>
           </a:p>
           <a:p>
             <a:pPr marL="914400" lvl="1" indent="-317500" algn="l" rtl="0">
@@ -17385,18 +17505,21 @@
               <a:buChar char="○"/>
             </a:pPr>
             <a:r>
-              <a:rPr lang="en-GB" dirty="0"/>
-              <a:t>Minimum de 4 </a:t>
-            </a:r>
-            <a:r>
-              <a:rPr lang="en-GB" dirty="0" err="1"/>
-              <a:t>systèmes</a:t>
-            </a:r>
-            <a:r>
-              <a:rPr lang="en-GB" dirty="0"/>
-              <a:t> (Ex: Navigation, Combat, etc)</a:t>
-            </a:r>
-            <a:endParaRPr dirty="0"/>
+              <a:rPr lang="fr-FR" b="1" dirty="0">
+                <a:solidFill>
+                  <a:schemeClr val="bg1"/>
+                </a:solidFill>
+              </a:rPr>
+              <a:t>Se déplacer : </a:t>
+            </a:r>
+            <a:r>
+              <a:rPr lang="fr-FR" dirty="0">
+                <a:solidFill>
+                  <a:schemeClr val="bg1"/>
+                </a:solidFill>
+              </a:rPr>
+              <a:t>dans les 2 axes. Déplacement illimité. Seule la jauge d’O² influence la durée de déplacement</a:t>
+            </a:r>
           </a:p>
           <a:p>
             <a:pPr marL="914400" lvl="1" indent="-317500" algn="l" rtl="0">
@@ -17413,50 +17536,166 @@
               <a:buChar char="○"/>
             </a:pPr>
             <a:r>
-              <a:rPr lang="en-GB" dirty="0"/>
-              <a:t>Avec au </a:t>
-            </a:r>
-            <a:r>
-              <a:rPr lang="en-GB" dirty="0" err="1"/>
-              <a:t>moins</a:t>
-            </a:r>
-            <a:r>
-              <a:rPr lang="en-GB" dirty="0"/>
-              <a:t> 2 </a:t>
-            </a:r>
-            <a:r>
-              <a:rPr lang="en-GB" dirty="0" err="1"/>
-              <a:t>mécaniques</a:t>
-            </a:r>
-            <a:r>
-              <a:rPr lang="en-GB" dirty="0"/>
-              <a:t> par </a:t>
-            </a:r>
-            <a:r>
-              <a:rPr lang="en-GB" dirty="0" err="1"/>
-              <a:t>système</a:t>
-            </a:r>
-            <a:r>
-              <a:rPr lang="en-GB" dirty="0"/>
-              <a:t> (Ex: </a:t>
-            </a:r>
-            <a:r>
-              <a:rPr lang="en-GB" dirty="0" err="1"/>
-              <a:t>Courir</a:t>
-            </a:r>
-            <a:r>
-              <a:rPr lang="en-GB" dirty="0"/>
-              <a:t>, </a:t>
-            </a:r>
-            <a:r>
-              <a:rPr lang="en-GB" dirty="0" err="1"/>
-              <a:t>frapper</a:t>
-            </a:r>
-            <a:r>
-              <a:rPr lang="en-GB" dirty="0"/>
-              <a:t>, etc)</a:t>
-            </a:r>
-            <a:endParaRPr dirty="0"/>
+              <a:rPr lang="fr-FR" b="1" dirty="0">
+                <a:solidFill>
+                  <a:schemeClr val="bg1"/>
+                </a:solidFill>
+              </a:rPr>
+              <a:t>Dash</a:t>
+            </a:r>
+            <a:r>
+              <a:rPr lang="fr-FR" dirty="0">
+                <a:solidFill>
+                  <a:schemeClr val="bg1"/>
+                </a:solidFill>
+              </a:rPr>
+              <a:t> : Permet de </a:t>
+            </a:r>
+            <a:r>
+              <a:rPr lang="fr-FR" dirty="0" err="1">
+                <a:solidFill>
+                  <a:schemeClr val="bg1"/>
+                </a:solidFill>
+              </a:rPr>
+              <a:t>dasher</a:t>
+            </a:r>
+            <a:r>
+              <a:rPr lang="fr-FR" dirty="0">
+                <a:solidFill>
+                  <a:schemeClr val="bg1"/>
+                </a:solidFill>
+              </a:rPr>
+              <a:t>. </a:t>
+            </a:r>
+            <a:r>
+              <a:rPr lang="fr-FR" dirty="0" err="1">
+                <a:solidFill>
+                  <a:schemeClr val="bg1"/>
+                </a:solidFill>
+              </a:rPr>
+              <a:t>Cooldown</a:t>
+            </a:r>
+            <a:r>
+              <a:rPr lang="fr-FR" dirty="0">
+                <a:solidFill>
+                  <a:schemeClr val="bg1"/>
+                </a:solidFill>
+              </a:rPr>
+              <a:t> de [x] secondes et perte d’air de [x].</a:t>
+            </a:r>
+            <a:endParaRPr dirty="0">
+              <a:solidFill>
+                <a:schemeClr val="bg1"/>
+              </a:solidFill>
+            </a:endParaRPr>
+          </a:p>
+          <a:p>
+            <a:pPr marL="914400" lvl="1" indent="-317500" algn="l" rtl="0">
+              <a:lnSpc>
+                <a:spcPct val="115000"/>
+              </a:lnSpc>
+              <a:spcBef>
+                <a:spcPts val="0"/>
+              </a:spcBef>
+              <a:spcAft>
+                <a:spcPts val="0"/>
+              </a:spcAft>
+              <a:buSzPts val="1400"/>
+              <a:buChar char="○"/>
+            </a:pPr>
+            <a:r>
+              <a:rPr lang="en-GB" b="1" dirty="0">
+                <a:solidFill>
+                  <a:schemeClr val="bg1"/>
+                </a:solidFill>
+              </a:rPr>
+              <a:t>Pointer la lumière </a:t>
+            </a:r>
+            <a:r>
+              <a:rPr lang="en-GB" dirty="0">
+                <a:solidFill>
+                  <a:schemeClr val="bg1"/>
+                </a:solidFill>
+              </a:rPr>
+              <a:t>: </a:t>
+            </a:r>
+            <a:r>
+              <a:rPr lang="en-GB" dirty="0" err="1">
+                <a:solidFill>
+                  <a:schemeClr val="bg1"/>
+                </a:solidFill>
+              </a:rPr>
+              <a:t>permet</a:t>
+            </a:r>
+            <a:r>
+              <a:rPr lang="en-GB" dirty="0">
+                <a:solidFill>
+                  <a:schemeClr val="bg1"/>
+                </a:solidFill>
+              </a:rPr>
+              <a:t> de se </a:t>
+            </a:r>
+            <a:r>
+              <a:rPr lang="en-GB" dirty="0" err="1">
+                <a:solidFill>
+                  <a:schemeClr val="bg1"/>
+                </a:solidFill>
+              </a:rPr>
+              <a:t>focaliser</a:t>
+            </a:r>
+            <a:r>
+              <a:rPr lang="en-GB" dirty="0">
+                <a:solidFill>
+                  <a:schemeClr val="bg1"/>
+                </a:solidFill>
+              </a:rPr>
+              <a:t> sur </a:t>
+            </a:r>
+            <a:r>
+              <a:rPr lang="en-GB" dirty="0" err="1">
+                <a:solidFill>
+                  <a:schemeClr val="bg1"/>
+                </a:solidFill>
+              </a:rPr>
+              <a:t>une</a:t>
+            </a:r>
+            <a:r>
+              <a:rPr lang="en-GB" dirty="0">
+                <a:solidFill>
+                  <a:schemeClr val="bg1"/>
+                </a:solidFill>
+              </a:rPr>
+              <a:t> zone precise </a:t>
+            </a:r>
+            <a:r>
+              <a:rPr lang="en-GB" dirty="0" err="1">
+                <a:solidFill>
+                  <a:schemeClr val="bg1"/>
+                </a:solidFill>
+              </a:rPr>
+              <a:t>durant</a:t>
+            </a:r>
+            <a:r>
+              <a:rPr lang="en-GB" dirty="0">
+                <a:solidFill>
+                  <a:schemeClr val="bg1"/>
+                </a:solidFill>
+              </a:rPr>
+              <a:t> la </a:t>
+            </a:r>
+            <a:r>
+              <a:rPr lang="en-GB" dirty="0" err="1">
+                <a:solidFill>
+                  <a:schemeClr val="bg1"/>
+                </a:solidFill>
+              </a:rPr>
+              <a:t>nage</a:t>
+            </a:r>
+            <a:endParaRPr dirty="0">
+              <a:solidFill>
+                <a:schemeClr val="bg1"/>
+              </a:solidFill>
+            </a:endParaRPr>
           </a:p>
         </p:txBody>
       </p:sp>

--- a/Bachelier_Kevin_SintaZaranie.pptx
+++ b/Bachelier_Kevin_SintaZaranie.pptx
@@ -46,7 +46,7 @@
       <p:boldItalic r:id="rId29"/>
     </p:embeddedFont>
     <p:embeddedFont>
-      <p:font typeface="OpineHeavy" pitchFamily="2" charset="0"/>
+      <p:font typeface="OpineHeavy" panose="020B0604020202020204"/>
       <p:regular r:id="rId30"/>
     </p:embeddedFont>
   </p:embeddedFontLst>
@@ -295,7 +295,7 @@
       </p15:sldGuideLst>
     </p:ext>
     <p:ext uri="GoogleSlidesCustomDataVersion2">
-      <go:slidesCustomData xmlns="" xmlns:mc="http://schemas.openxmlformats.org/markup-compatibility/2006" xmlns:mv="urn:schemas-microsoft-com:mac:vml" xmlns:c="http://schemas.openxmlformats.org/drawingml/2006/chart" xmlns:dgm="http://schemas.openxmlformats.org/drawingml/2006/diagram" xmlns:o="urn:schemas-microsoft-com:office:office" xmlns:v="urn:schemas-microsoft-com:vml" xmlns:pvml="urn:schemas-microsoft-com:office:powerpoint" xmlns:com="http://schemas.openxmlformats.org/drawingml/2006/compatibility" xmlns:p14="http://schemas.microsoft.com/office/powerpoint/2010/main" xmlns:p15="http://schemas.microsoft.com/office/powerpoint/2012/main" xmlns:ahyp="http://schemas.microsoft.com/office/drawing/2018/hyperlinkcolor" xmlns:go="http://customooxmlschemas.google.com/" r:id="rId31" roundtripDataSignature="AMtx7mjvIUtGSNpVopzYnf23dxEsE/fdMA=="/>
+      <go:slidesCustomData xmlns:go="http://customooxmlschemas.google.com/" xmlns:ahyp="http://schemas.microsoft.com/office/drawing/2018/hyperlinkcolor" xmlns:p15="http://schemas.microsoft.com/office/powerpoint/2012/main" xmlns:p14="http://schemas.microsoft.com/office/powerpoint/2010/main" xmlns:com="http://schemas.openxmlformats.org/drawingml/2006/compatibility" xmlns:pvml="urn:schemas-microsoft-com:office:powerpoint" xmlns:v="urn:schemas-microsoft-com:vml" xmlns:o="urn:schemas-microsoft-com:office:office" xmlns:dgm="http://schemas.openxmlformats.org/drawingml/2006/diagram" xmlns:c="http://schemas.openxmlformats.org/drawingml/2006/chart" xmlns:mv="urn:schemas-microsoft-com:mac:vml" xmlns:mc="http://schemas.openxmlformats.org/markup-compatibility/2006" xmlns="" r:id="rId31" roundtripDataSignature="AMtx7mjvIUtGSNpVopzYnf23dxEsE/fdMA=="/>
     </p:ext>
   </p:extLst>
 </p:presentation>
@@ -11144,6 +11144,14 @@
 <file path=ppt/slides/slide11.xml><?xml version="1.0" encoding="utf-8"?>
 <p:sld xmlns:a="http://schemas.openxmlformats.org/drawingml/2006/main" xmlns:r="http://schemas.openxmlformats.org/officeDocument/2006/relationships" xmlns:p="http://schemas.openxmlformats.org/presentationml/2006/main">
   <p:cSld>
+    <p:bg>
+      <p:bgPr>
+        <a:solidFill>
+          <a:srgbClr val="3A8EF4"/>
+        </a:solidFill>
+        <a:effectLst/>
+      </p:bgPr>
+    </p:bg>
     <p:spTree>
       <p:nvGrpSpPr>
         <p:cNvPr id="1" name="Shape 109"/>
@@ -11201,10 +11209,18 @@
               <a:buNone/>
             </a:pPr>
             <a:r>
-              <a:rPr lang="en-GB"/>
+              <a:rPr lang="en-GB" dirty="0">
+                <a:solidFill>
+                  <a:schemeClr val="bg1"/>
+                </a:solidFill>
+              </a:rPr>
               <a:t>Main features</a:t>
             </a:r>
-            <a:endParaRPr/>
+            <a:endParaRPr dirty="0">
+              <a:solidFill>
+                <a:schemeClr val="bg1"/>
+              </a:solidFill>
+            </a:endParaRPr>
           </a:p>
         </p:txBody>
       </p:sp>
@@ -11237,7 +11253,7 @@
           </a:bodyPr>
           <a:lstStyle/>
           <a:p>
-            <a:pPr marL="457200" lvl="0" indent="-342900" algn="l" rtl="0">
+            <a:pPr marL="114300" lvl="0" indent="0" algn="l" rtl="0">
               <a:lnSpc>
                 <a:spcPct val="115000"/>
               </a:lnSpc>
@@ -11248,57 +11264,76 @@
                 <a:spcPts val="0"/>
               </a:spcAft>
               <a:buSzPts val="1800"/>
-              <a:buChar char="●"/>
+              <a:buNone/>
             </a:pPr>
             <a:r>
-              <a:rPr lang="en-GB" dirty="0" err="1"/>
-              <a:t>Systèmes</a:t>
-            </a:r>
-            <a:r>
-              <a:rPr lang="en-GB" dirty="0"/>
-              <a:t> </a:t>
-            </a:r>
-            <a:r>
-              <a:rPr lang="en-GB" dirty="0" err="1"/>
-              <a:t>nécessaires</a:t>
-            </a:r>
-            <a:r>
-              <a:rPr lang="en-GB" dirty="0"/>
-              <a:t> à </a:t>
-            </a:r>
-            <a:r>
-              <a:rPr lang="en-GB" dirty="0" err="1"/>
-              <a:t>ce</a:t>
-            </a:r>
-            <a:r>
-              <a:rPr lang="en-GB" dirty="0"/>
-              <a:t> que je </a:t>
-            </a:r>
-            <a:r>
-              <a:rPr lang="en-GB" dirty="0" err="1"/>
-              <a:t>puisse</a:t>
-            </a:r>
-            <a:r>
-              <a:rPr lang="en-GB" dirty="0"/>
-              <a:t> </a:t>
-            </a:r>
-            <a:r>
-              <a:rPr lang="en-GB" dirty="0" err="1"/>
-              <a:t>remplir</a:t>
-            </a:r>
-            <a:r>
-              <a:rPr lang="en-GB" dirty="0"/>
-              <a:t> les action de </a:t>
-            </a:r>
-            <a:r>
-              <a:rPr lang="en-GB" dirty="0" err="1"/>
-              <a:t>mes</a:t>
-            </a:r>
-            <a:r>
-              <a:rPr lang="en-GB" dirty="0"/>
-              <a:t> game loops</a:t>
-            </a:r>
-            <a:endParaRPr dirty="0"/>
+              <a:rPr lang="fr-FR" b="1" dirty="0">
+                <a:solidFill>
+                  <a:schemeClr val="bg1"/>
+                </a:solidFill>
+              </a:rPr>
+              <a:t>Système d’</a:t>
+            </a:r>
+            <a:r>
+              <a:rPr lang="fr-FR" b="1" dirty="0" err="1">
+                <a:solidFill>
+                  <a:schemeClr val="bg1"/>
+                </a:solidFill>
+              </a:rPr>
+              <a:t>uprade</a:t>
+            </a:r>
+            <a:r>
+              <a:rPr lang="fr-FR" b="1" dirty="0">
+                <a:solidFill>
+                  <a:schemeClr val="bg1"/>
+                </a:solidFill>
+              </a:rPr>
+              <a:t> (Interface)</a:t>
+            </a:r>
+          </a:p>
+          <a:p>
+            <a:pPr marL="114300" lvl="0" indent="0" algn="l" rtl="0">
+              <a:lnSpc>
+                <a:spcPct val="115000"/>
+              </a:lnSpc>
+              <a:spcBef>
+                <a:spcPts val="0"/>
+              </a:spcBef>
+              <a:spcAft>
+                <a:spcPts val="0"/>
+              </a:spcAft>
+              <a:buSzPts val="1800"/>
+              <a:buNone/>
+            </a:pPr>
+            <a:r>
+              <a:rPr lang="fr-FR" dirty="0">
+                <a:solidFill>
+                  <a:schemeClr val="bg1"/>
+                </a:solidFill>
+              </a:rPr>
+              <a:t>Le système d’upgrade permet d’améliorer les différentes mécaniques du jeu (</a:t>
+            </a:r>
+            <a:r>
+              <a:rPr lang="fr-FR" dirty="0" err="1">
+                <a:solidFill>
+                  <a:schemeClr val="bg1"/>
+                </a:solidFill>
+              </a:rPr>
+              <a:t>dash</a:t>
+            </a:r>
+            <a:r>
+              <a:rPr lang="fr-FR" dirty="0">
+                <a:solidFill>
+                  <a:schemeClr val="bg1"/>
+                </a:solidFill>
+              </a:rPr>
+              <a:t>, conteneur d’O², lumière (fanal),…</a:t>
+            </a:r>
+            <a:endParaRPr dirty="0">
+              <a:solidFill>
+                <a:schemeClr val="bg1"/>
+              </a:solidFill>
+            </a:endParaRPr>
           </a:p>
           <a:p>
             <a:pPr marL="914400" lvl="1" indent="-317500" algn="l" rtl="0">
@@ -11315,18 +11350,26 @@
               <a:buChar char="○"/>
             </a:pPr>
             <a:r>
-              <a:rPr lang="en-GB" dirty="0"/>
-              <a:t>Minimum de 4 </a:t>
-            </a:r>
-            <a:r>
-              <a:rPr lang="en-GB" dirty="0" err="1"/>
-              <a:t>systèmes</a:t>
-            </a:r>
-            <a:r>
-              <a:rPr lang="en-GB" dirty="0"/>
-              <a:t> (Ex: Navigation, Combat, etc)</a:t>
-            </a:r>
-            <a:endParaRPr dirty="0"/>
+              <a:rPr lang="fr-FR" b="1" dirty="0">
+                <a:solidFill>
+                  <a:schemeClr val="bg1"/>
+                </a:solidFill>
+              </a:rPr>
+              <a:t>Hold</a:t>
+            </a:r>
+            <a:r>
+              <a:rPr lang="fr-FR" dirty="0">
+                <a:solidFill>
+                  <a:schemeClr val="bg1"/>
+                </a:solidFill>
+              </a:rPr>
+              <a:t> : Valider l’upgrade d’un item</a:t>
+            </a:r>
+            <a:endParaRPr dirty="0">
+              <a:solidFill>
+                <a:schemeClr val="bg1"/>
+              </a:solidFill>
+            </a:endParaRPr>
           </a:p>
           <a:p>
             <a:pPr marL="914400" lvl="1" indent="-317500" algn="l" rtl="0">
@@ -11343,50 +11386,226 @@
               <a:buChar char="○"/>
             </a:pPr>
             <a:r>
-              <a:rPr lang="en-GB" dirty="0"/>
-              <a:t>Avec au </a:t>
-            </a:r>
-            <a:r>
-              <a:rPr lang="en-GB" dirty="0" err="1"/>
-              <a:t>moins</a:t>
-            </a:r>
-            <a:r>
-              <a:rPr lang="en-GB" dirty="0"/>
-              <a:t> 2 </a:t>
-            </a:r>
-            <a:r>
-              <a:rPr lang="en-GB" dirty="0" err="1"/>
-              <a:t>mécaniques</a:t>
-            </a:r>
-            <a:r>
-              <a:rPr lang="en-GB" dirty="0"/>
-              <a:t> par </a:t>
-            </a:r>
-            <a:r>
-              <a:rPr lang="en-GB" dirty="0" err="1"/>
-              <a:t>système</a:t>
-            </a:r>
-            <a:r>
-              <a:rPr lang="en-GB" dirty="0"/>
-              <a:t> (Ex: </a:t>
-            </a:r>
-            <a:r>
-              <a:rPr lang="en-GB" dirty="0" err="1"/>
-              <a:t>Courir</a:t>
-            </a:r>
-            <a:r>
-              <a:rPr lang="en-GB" dirty="0"/>
+              <a:rPr lang="en-GB" dirty="0">
+                <a:solidFill>
+                  <a:schemeClr val="bg1"/>
+                </a:solidFill>
+              </a:rPr>
+              <a:t>Idée possible : </a:t>
+            </a:r>
+            <a:r>
+              <a:rPr lang="en-GB" dirty="0" err="1">
+                <a:solidFill>
+                  <a:schemeClr val="bg1"/>
+                </a:solidFill>
+              </a:rPr>
+              <a:t>scanneur</a:t>
+            </a:r>
+            <a:r>
+              <a:rPr lang="en-GB" dirty="0">
+                <a:solidFill>
+                  <a:schemeClr val="bg1"/>
+                </a:solidFill>
+              </a:rPr>
+              <a:t> </a:t>
+            </a:r>
+            <a:r>
+              <a:rPr lang="en-GB" dirty="0" err="1">
+                <a:solidFill>
+                  <a:schemeClr val="bg1"/>
+                </a:solidFill>
+              </a:rPr>
+              <a:t>d’ID</a:t>
+            </a:r>
+            <a:r>
+              <a:rPr lang="en-GB" dirty="0">
+                <a:solidFill>
+                  <a:schemeClr val="bg1"/>
+                </a:solidFill>
+              </a:rPr>
+              <a:t> : il </a:t>
+            </a:r>
+            <a:r>
+              <a:rPr lang="en-GB" dirty="0" err="1">
+                <a:solidFill>
+                  <a:schemeClr val="bg1"/>
+                </a:solidFill>
+              </a:rPr>
+              <a:t>serait</a:t>
+            </a:r>
+            <a:r>
+              <a:rPr lang="en-GB" dirty="0">
+                <a:solidFill>
+                  <a:schemeClr val="bg1"/>
+                </a:solidFill>
+              </a:rPr>
+              <a:t> </a:t>
+            </a:r>
+            <a:r>
+              <a:rPr lang="en-GB" dirty="0" err="1">
+                <a:solidFill>
+                  <a:schemeClr val="bg1"/>
+                </a:solidFill>
+              </a:rPr>
+              <a:t>peut-être</a:t>
+            </a:r>
+            <a:r>
+              <a:rPr lang="en-GB" dirty="0">
+                <a:solidFill>
+                  <a:schemeClr val="bg1"/>
+                </a:solidFill>
+              </a:rPr>
+              <a:t> possible de scanner les IDs </a:t>
+            </a:r>
+            <a:r>
+              <a:rPr lang="en-GB" dirty="0" err="1">
+                <a:solidFill>
+                  <a:schemeClr val="bg1"/>
+                </a:solidFill>
+              </a:rPr>
+              <a:t>trouvées</a:t>
+            </a:r>
+            <a:r>
+              <a:rPr lang="en-GB" dirty="0">
+                <a:solidFill>
+                  <a:schemeClr val="bg1"/>
+                </a:solidFill>
+              </a:rPr>
+              <a:t> pour </a:t>
+            </a:r>
+            <a:r>
+              <a:rPr lang="en-GB" dirty="0" err="1">
+                <a:solidFill>
+                  <a:schemeClr val="bg1"/>
+                </a:solidFill>
+              </a:rPr>
+              <a:t>connaître</a:t>
+            </a:r>
+            <a:r>
+              <a:rPr lang="en-GB" dirty="0">
+                <a:solidFill>
+                  <a:schemeClr val="bg1"/>
+                </a:solidFill>
+              </a:rPr>
+              <a:t> </a:t>
+            </a:r>
+            <a:r>
+              <a:rPr lang="en-GB" dirty="0" err="1">
+                <a:solidFill>
+                  <a:schemeClr val="bg1"/>
+                </a:solidFill>
+              </a:rPr>
+              <a:t>une</a:t>
+            </a:r>
+            <a:r>
+              <a:rPr lang="en-GB" dirty="0">
+                <a:solidFill>
+                  <a:schemeClr val="bg1"/>
+                </a:solidFill>
+              </a:rPr>
+              <a:t> </a:t>
+            </a:r>
+            <a:r>
+              <a:rPr lang="en-GB" dirty="0" err="1">
+                <a:solidFill>
+                  <a:schemeClr val="bg1"/>
+                </a:solidFill>
+              </a:rPr>
+              <a:t>adresse</a:t>
+            </a:r>
+            <a:r>
+              <a:rPr lang="en-GB" dirty="0">
+                <a:solidFill>
+                  <a:schemeClr val="bg1"/>
+                </a:solidFill>
+              </a:rPr>
+              <a:t>, un nom précis,… </a:t>
+            </a:r>
+            <a:r>
+              <a:rPr lang="en-GB" dirty="0" err="1">
+                <a:solidFill>
+                  <a:schemeClr val="bg1"/>
+                </a:solidFill>
+              </a:rPr>
+              <a:t>Mécanique</a:t>
+            </a:r>
+            <a:r>
+              <a:rPr lang="en-GB" dirty="0">
+                <a:solidFill>
+                  <a:schemeClr val="bg1"/>
+                </a:solidFill>
+              </a:rPr>
+              <a:t> → </a:t>
+            </a:r>
+            <a:r>
+              <a:rPr lang="en-GB" b="1" dirty="0" err="1">
+                <a:solidFill>
+                  <a:schemeClr val="bg1"/>
+                </a:solidFill>
+              </a:rPr>
+              <a:t>rentrer</a:t>
+            </a:r>
+            <a:r>
+              <a:rPr lang="en-GB" b="1" dirty="0">
+                <a:solidFill>
+                  <a:schemeClr val="bg1"/>
+                </a:solidFill>
+              </a:rPr>
+              <a:t> la carte dans le </a:t>
+            </a:r>
+            <a:r>
+              <a:rPr lang="en-GB" b="1" dirty="0" err="1">
+                <a:solidFill>
+                  <a:schemeClr val="bg1"/>
+                </a:solidFill>
+              </a:rPr>
+              <a:t>lecteur</a:t>
+            </a:r>
+            <a:r>
+              <a:rPr lang="en-GB" dirty="0">
+                <a:solidFill>
+                  <a:schemeClr val="bg1"/>
+                </a:solidFill>
+              </a:rPr>
               <a:t>, </a:t>
             </a:r>
             <a:r>
-              <a:rPr lang="en-GB" dirty="0" err="1"/>
-              <a:t>frapper</a:t>
-            </a:r>
-            <a:r>
-              <a:rPr lang="en-GB" dirty="0"/>
-              <a:t>, etc)</a:t>
-            </a:r>
-            <a:endParaRPr dirty="0"/>
+              <a:rPr lang="en-GB" dirty="0" err="1">
+                <a:solidFill>
+                  <a:schemeClr val="bg1"/>
+                </a:solidFill>
+              </a:rPr>
+              <a:t>puis</a:t>
+            </a:r>
+            <a:r>
+              <a:rPr lang="en-GB" dirty="0">
+                <a:solidFill>
+                  <a:schemeClr val="bg1"/>
+                </a:solidFill>
+              </a:rPr>
+              <a:t> la </a:t>
+            </a:r>
+            <a:r>
+              <a:rPr lang="en-GB" dirty="0" err="1">
+                <a:solidFill>
+                  <a:schemeClr val="bg1"/>
+                </a:solidFill>
+              </a:rPr>
+              <a:t>ressortir</a:t>
+            </a:r>
+            <a:r>
+              <a:rPr lang="en-GB" dirty="0">
+                <a:solidFill>
+                  <a:schemeClr val="bg1"/>
+                </a:solidFill>
+              </a:rPr>
+              <a:t>. </a:t>
+            </a:r>
+            <a:endParaRPr dirty="0">
+              <a:solidFill>
+                <a:schemeClr val="bg1"/>
+              </a:solidFill>
+            </a:endParaRPr>
           </a:p>
         </p:txBody>
       </p:sp>
@@ -11463,124 +11682,10 @@
               <a:buNone/>
             </a:pPr>
             <a:r>
-              <a:rPr lang="en-GB"/>
-              <a:t>3Cs Character</a:t>
-            </a:r>
-            <a:endParaRPr/>
-          </a:p>
-        </p:txBody>
-      </p:sp>
-      <p:sp>
-        <p:nvSpPr>
-          <p:cNvPr id="117" name="Google Shape;117;p9"/>
-          <p:cNvSpPr/>
-          <p:nvPr/>
-        </p:nvSpPr>
-        <p:spPr>
-          <a:xfrm>
-            <a:off x="384825" y="1161925"/>
-            <a:ext cx="1916700" cy="3693000"/>
-          </a:xfrm>
-          <a:prstGeom prst="rect">
-            <a:avLst/>
-          </a:prstGeom>
-          <a:solidFill>
-            <a:srgbClr val="FFFFFF"/>
-          </a:solidFill>
-          <a:ln w="9525" cap="flat" cmpd="sng">
-            <a:solidFill>
-              <a:schemeClr val="dk2"/>
-            </a:solidFill>
-            <a:prstDash val="solid"/>
-            <a:round/>
-            <a:headEnd type="none" w="sm" len="sm"/>
-            <a:tailEnd type="none" w="sm" len="sm"/>
-          </a:ln>
-        </p:spPr>
-        <p:txBody>
-          <a:bodyPr spcFirstLastPara="1" wrap="square" lIns="91425" tIns="91425" rIns="91425" bIns="91425" anchor="ctr" anchorCtr="0">
-            <a:noAutofit/>
-          </a:bodyPr>
-          <a:lstStyle/>
-          <a:p>
-            <a:pPr marL="0" marR="0" lvl="0" indent="0" algn="l" rtl="0">
-              <a:lnSpc>
-                <a:spcPct val="100000"/>
-              </a:lnSpc>
-              <a:spcBef>
-                <a:spcPts val="0"/>
-              </a:spcBef>
-              <a:spcAft>
-                <a:spcPts val="0"/>
-              </a:spcAft>
-              <a:buClr>
-                <a:srgbClr val="000000"/>
-              </a:buClr>
-              <a:buSzPts val="1400"/>
-              <a:buFont typeface="Arial"/>
-              <a:buNone/>
-            </a:pPr>
-            <a:r>
-              <a:rPr lang="en-GB" sz="1400" b="0" i="0" u="none" strike="noStrike" cap="none">
-                <a:solidFill>
-                  <a:srgbClr val="000000"/>
-                </a:solidFill>
-                <a:latin typeface="Economica"/>
-                <a:ea typeface="Economica"/>
-                <a:cs typeface="Economica"/>
-                <a:sym typeface="Economica"/>
-              </a:rPr>
-              <a:t>Image de mon perso</a:t>
-            </a:r>
-            <a:endParaRPr sz="1400" b="0" i="0" u="none" strike="noStrike" cap="none">
-              <a:solidFill>
-                <a:srgbClr val="000000"/>
-              </a:solidFill>
-              <a:latin typeface="Economica"/>
-              <a:ea typeface="Economica"/>
-              <a:cs typeface="Economica"/>
-              <a:sym typeface="Economica"/>
-            </a:endParaRPr>
-          </a:p>
-          <a:p>
-            <a:pPr marL="0" marR="0" lvl="0" indent="0" algn="l" rtl="0">
-              <a:lnSpc>
-                <a:spcPct val="100000"/>
-              </a:lnSpc>
-              <a:spcBef>
-                <a:spcPts val="0"/>
-              </a:spcBef>
-              <a:spcAft>
-                <a:spcPts val="0"/>
-              </a:spcAft>
-              <a:buClr>
-                <a:srgbClr val="000000"/>
-              </a:buClr>
-              <a:buSzPts val="1400"/>
-              <a:buFont typeface="Arial"/>
-              <a:buNone/>
-            </a:pPr>
-            <a:r>
-              <a:rPr lang="en-GB" sz="1400" b="0" i="0" u="none" strike="noStrike" cap="none">
-                <a:solidFill>
-                  <a:srgbClr val="000000"/>
-                </a:solidFill>
-                <a:latin typeface="Economica"/>
-                <a:ea typeface="Economica"/>
-                <a:cs typeface="Economica"/>
-                <a:sym typeface="Economica"/>
-              </a:rPr>
-              <a:t>Ou inspiration de</a:t>
-            </a:r>
-            <a:endParaRPr sz="1400" b="0" i="0" u="none" strike="noStrike" cap="none">
-              <a:solidFill>
-                <a:srgbClr val="000000"/>
-              </a:solidFill>
-              <a:latin typeface="Economica"/>
-              <a:ea typeface="Economica"/>
-              <a:cs typeface="Economica"/>
-              <a:sym typeface="Economica"/>
-            </a:endParaRPr>
+              <a:rPr lang="en-GB" dirty="0"/>
+              <a:t>3Cs Character - Louis</a:t>
+            </a:r>
+            <a:endParaRPr dirty="0"/>
           </a:p>
         </p:txBody>
       </p:sp>
@@ -11593,7 +11698,7 @@
         <p:spPr>
           <a:xfrm>
             <a:off x="2501450" y="1154500"/>
-            <a:ext cx="6534900" cy="2555100"/>
+            <a:ext cx="6534900" cy="2123628"/>
           </a:xfrm>
           <a:prstGeom prst="rect">
             <a:avLst/>
@@ -11627,7 +11732,7 @@
               <a:buNone/>
             </a:pPr>
             <a:r>
-              <a:rPr lang="en-GB" sz="1400" b="0" i="0" u="none" strike="noStrike" cap="none">
+              <a:rPr lang="en-GB" sz="1400" b="0" i="0" u="none" strike="noStrike" cap="none" dirty="0" err="1">
                 <a:solidFill>
                   <a:srgbClr val="000000"/>
                 </a:solidFill>
@@ -11636,9 +11741,21 @@
                 <a:cs typeface="Economica"/>
                 <a:sym typeface="Economica"/>
               </a:rPr>
-              <a:t>Mouvements ex:</a:t>
-            </a:r>
-            <a:endParaRPr sz="1400" b="0" i="0" u="none" strike="noStrike" cap="none">
+              <a:t>Mouvements</a:t>
+            </a:r>
+            <a:r>
+              <a:rPr lang="en-GB" sz="1400" b="0" i="0" u="none" strike="noStrike" cap="none" dirty="0">
+                <a:solidFill>
+                  <a:srgbClr val="000000"/>
+                </a:solidFill>
+                <a:latin typeface="Economica"/>
+                <a:ea typeface="Economica"/>
+                <a:cs typeface="Economica"/>
+                <a:sym typeface="Economica"/>
+              </a:rPr>
+              <a:t>:</a:t>
+            </a:r>
+            <a:endParaRPr sz="1400" b="0" i="0" u="none" strike="noStrike" cap="none" dirty="0">
               <a:solidFill>
                 <a:srgbClr val="000000"/>
               </a:solidFill>
@@ -11667,7 +11784,7 @@
               <a:buChar char="●"/>
             </a:pPr>
             <a:r>
-              <a:rPr lang="en-GB" sz="1400" b="0" i="0" u="none" strike="noStrike" cap="none">
+              <a:rPr lang="fr-FR" sz="1400" b="0" i="0" u="none" strike="noStrike" cap="none" dirty="0">
                 <a:solidFill>
                   <a:srgbClr val="000000"/>
                 </a:solidFill>
@@ -11676,9 +11793,9 @@
                 <a:cs typeface="Economica"/>
                 <a:sym typeface="Economica"/>
               </a:rPr>
-              <a:t>Courir</a:t>
-            </a:r>
-            <a:endParaRPr sz="1400" b="0" i="0" u="none" strike="noStrike" cap="none">
+              <a:t>Nager</a:t>
+            </a:r>
+            <a:endParaRPr sz="1400" b="0" i="0" u="none" strike="noStrike" cap="none" dirty="0">
               <a:solidFill>
                 <a:srgbClr val="000000"/>
               </a:solidFill>
@@ -11707,7 +11824,7 @@
               <a:buChar char="●"/>
             </a:pPr>
             <a:r>
-              <a:rPr lang="en-GB" sz="1400" b="0" i="0" u="none" strike="noStrike" cap="none">
+              <a:rPr lang="en-GB" sz="1400" b="0" i="0" u="none" strike="noStrike" cap="none" dirty="0">
                 <a:solidFill>
                   <a:srgbClr val="000000"/>
                 </a:solidFill>
@@ -11716,9 +11833,9 @@
                 <a:cs typeface="Economica"/>
                 <a:sym typeface="Economica"/>
               </a:rPr>
-              <a:t>Marcher</a:t>
-            </a:r>
-            <a:endParaRPr sz="1400" b="0" i="0" u="none" strike="noStrike" cap="none">
+              <a:t>Dasher</a:t>
+            </a:r>
+            <a:endParaRPr sz="1400" b="0" i="0" u="none" strike="noStrike" cap="none" dirty="0">
               <a:solidFill>
                 <a:srgbClr val="000000"/>
               </a:solidFill>
@@ -11747,18 +11864,107 @@
               <a:buChar char="●"/>
             </a:pPr>
             <a:r>
-              <a:rPr lang="en-GB" sz="1400" b="0" i="0" u="none" strike="noStrike" cap="none">
-                <a:solidFill>
-                  <a:srgbClr val="000000"/>
-                </a:solidFill>
+              <a:rPr lang="en-GB" dirty="0" err="1">
                 <a:latin typeface="Economica"/>
                 <a:ea typeface="Economica"/>
                 <a:cs typeface="Economica"/>
                 <a:sym typeface="Economica"/>
               </a:rPr>
-              <a:t>Strafer </a:t>
-            </a:r>
-            <a:endParaRPr sz="1400" b="0" i="0" u="none" strike="noStrike" cap="none">
+              <a:t>Ramasser</a:t>
+            </a:r>
+            <a:r>
+              <a:rPr lang="en-GB" sz="1400" b="0" i="0" u="none" strike="noStrike" cap="none" dirty="0">
+                <a:solidFill>
+                  <a:srgbClr val="000000"/>
+                </a:solidFill>
+                <a:latin typeface="Economica"/>
+                <a:ea typeface="Economica"/>
+                <a:cs typeface="Economica"/>
+                <a:sym typeface="Economica"/>
+              </a:rPr>
+              <a:t> item</a:t>
+            </a:r>
+            <a:endParaRPr sz="1400" b="0" i="0" u="none" strike="noStrike" cap="none" dirty="0">
+              <a:solidFill>
+                <a:srgbClr val="000000"/>
+              </a:solidFill>
+              <a:latin typeface="Economica"/>
+              <a:ea typeface="Economica"/>
+              <a:cs typeface="Economica"/>
+              <a:sym typeface="Economica"/>
+            </a:endParaRPr>
+          </a:p>
+          <a:p>
+            <a:pPr marL="0" marR="0" lvl="0" indent="0" algn="l" rtl="0">
+              <a:lnSpc>
+                <a:spcPct val="100000"/>
+              </a:lnSpc>
+              <a:spcBef>
+                <a:spcPts val="0"/>
+              </a:spcBef>
+              <a:spcAft>
+                <a:spcPts val="0"/>
+              </a:spcAft>
+              <a:buClr>
+                <a:srgbClr val="000000"/>
+              </a:buClr>
+              <a:buSzPts val="1400"/>
+              <a:buFont typeface="Arial"/>
+              <a:buNone/>
+            </a:pPr>
+            <a:endParaRPr sz="1400" b="0" i="0" u="none" strike="noStrike" cap="none" dirty="0">
+              <a:solidFill>
+                <a:srgbClr val="000000"/>
+              </a:solidFill>
+              <a:latin typeface="Economica"/>
+              <a:ea typeface="Economica"/>
+              <a:cs typeface="Economica"/>
+              <a:sym typeface="Economica"/>
+            </a:endParaRPr>
+          </a:p>
+          <a:p>
+            <a:pPr marL="0" marR="0" lvl="0" indent="0" algn="l" rtl="0">
+              <a:lnSpc>
+                <a:spcPct val="100000"/>
+              </a:lnSpc>
+              <a:spcBef>
+                <a:spcPts val="0"/>
+              </a:spcBef>
+              <a:spcAft>
+                <a:spcPts val="0"/>
+              </a:spcAft>
+              <a:buClr>
+                <a:srgbClr val="000000"/>
+              </a:buClr>
+              <a:buSzPts val="1400"/>
+              <a:buFont typeface="Arial"/>
+              <a:buNone/>
+            </a:pPr>
+            <a:r>
+              <a:rPr lang="en-GB" sz="1400" b="0" i="0" u="none" strike="noStrike" cap="none" dirty="0" err="1">
+                <a:solidFill>
+                  <a:srgbClr val="000000"/>
+                </a:solidFill>
+                <a:latin typeface="Economica"/>
+                <a:ea typeface="Economica"/>
+                <a:cs typeface="Economica"/>
+                <a:sym typeface="Economica"/>
+              </a:rPr>
+              <a:t>Abiletés</a:t>
+            </a:r>
+            <a:r>
+              <a:rPr lang="en-GB" sz="1400" b="0" i="0" u="none" strike="noStrike" cap="none" dirty="0">
+                <a:solidFill>
+                  <a:srgbClr val="000000"/>
+                </a:solidFill>
+                <a:latin typeface="Economica"/>
+                <a:ea typeface="Economica"/>
+                <a:cs typeface="Economica"/>
+                <a:sym typeface="Economica"/>
+              </a:rPr>
+              <a:t> :</a:t>
+            </a:r>
+            <a:endParaRPr sz="1400" b="0" i="0" u="none" strike="noStrike" cap="none" dirty="0">
               <a:solidFill>
                 <a:srgbClr val="000000"/>
               </a:solidFill>
@@ -11787,7 +11993,7 @@
               <a:buChar char="●"/>
             </a:pPr>
             <a:r>
-              <a:rPr lang="en-GB" sz="1400" b="0" i="0" u="none" strike="noStrike" cap="none">
+              <a:rPr lang="fr-FR" sz="1400" b="0" i="0" u="none" strike="noStrike" cap="none" dirty="0">
                 <a:solidFill>
                   <a:srgbClr val="000000"/>
                 </a:solidFill>
@@ -11796,77 +12002,9 @@
                 <a:cs typeface="Economica"/>
                 <a:sym typeface="Economica"/>
               </a:rPr>
-              <a:t>etc</a:t>
-            </a:r>
-            <a:endParaRPr sz="1400" b="0" i="0" u="none" strike="noStrike" cap="none">
-              <a:solidFill>
-                <a:srgbClr val="000000"/>
-              </a:solidFill>
-              <a:latin typeface="Economica"/>
-              <a:ea typeface="Economica"/>
-              <a:cs typeface="Economica"/>
-              <a:sym typeface="Economica"/>
-            </a:endParaRPr>
-          </a:p>
-          <a:p>
-            <a:pPr marL="0" marR="0" lvl="0" indent="0" algn="l" rtl="0">
-              <a:lnSpc>
-                <a:spcPct val="100000"/>
-              </a:lnSpc>
-              <a:spcBef>
-                <a:spcPts val="0"/>
-              </a:spcBef>
-              <a:spcAft>
-                <a:spcPts val="0"/>
-              </a:spcAft>
-              <a:buClr>
-                <a:srgbClr val="000000"/>
-              </a:buClr>
-              <a:buSzPts val="1400"/>
-              <a:buFont typeface="Arial"/>
-              <a:buNone/>
-            </a:pPr>
-            <a:endParaRPr sz="1400" b="0" i="0" u="none" strike="noStrike" cap="none">
-              <a:solidFill>
-                <a:srgbClr val="000000"/>
-              </a:solidFill>
-              <a:latin typeface="Economica"/>
-              <a:ea typeface="Economica"/>
-              <a:cs typeface="Economica"/>
-              <a:sym typeface="Economica"/>
-            </a:endParaRPr>
-          </a:p>
-          <a:p>
-            <a:pPr marL="0" marR="0" lvl="0" indent="0" algn="l" rtl="0">
-              <a:lnSpc>
-                <a:spcPct val="100000"/>
-              </a:lnSpc>
-              <a:spcBef>
-                <a:spcPts val="0"/>
-              </a:spcBef>
-              <a:spcAft>
-                <a:spcPts val="0"/>
-              </a:spcAft>
-              <a:buClr>
-                <a:srgbClr val="000000"/>
-              </a:buClr>
-              <a:buSzPts val="1400"/>
-              <a:buFont typeface="Arial"/>
-              <a:buNone/>
-            </a:pPr>
-            <a:r>
-              <a:rPr lang="en-GB" sz="1400" b="0" i="0" u="none" strike="noStrike" cap="none">
-                <a:solidFill>
-                  <a:srgbClr val="000000"/>
-                </a:solidFill>
-                <a:latin typeface="Economica"/>
-                <a:ea typeface="Economica"/>
-                <a:cs typeface="Economica"/>
-                <a:sym typeface="Economica"/>
-              </a:rPr>
-              <a:t>Abiletés ex:</a:t>
-            </a:r>
-            <a:endParaRPr sz="1400" b="0" i="0" u="none" strike="noStrike" cap="none">
+              <a:t>Focus la lumière</a:t>
+            </a:r>
+            <a:endParaRPr sz="1400" b="0" i="0" u="none" strike="noStrike" cap="none" dirty="0">
               <a:solidFill>
                 <a:srgbClr val="000000"/>
               </a:solidFill>
@@ -11895,7 +12033,7 @@
               <a:buChar char="●"/>
             </a:pPr>
             <a:r>
-              <a:rPr lang="en-GB" sz="1400" b="0" i="0" u="none" strike="noStrike" cap="none">
+              <a:rPr lang="en-GB" sz="1400" b="0" i="0" u="none" strike="noStrike" cap="none" dirty="0" err="1">
                 <a:solidFill>
                   <a:srgbClr val="000000"/>
                 </a:solidFill>
@@ -11904,12 +12042,45 @@
                 <a:cs typeface="Economica"/>
                 <a:sym typeface="Economica"/>
               </a:rPr>
-              <a:t>Tirer</a:t>
-            </a:r>
-            <a:endParaRPr sz="1400" b="0" i="0" u="none" strike="noStrike" cap="none">
-              <a:solidFill>
-                <a:srgbClr val="000000"/>
-              </a:solidFill>
+              <a:t>Retirer</a:t>
+            </a:r>
+            <a:r>
+              <a:rPr lang="en-GB" sz="1400" b="0" i="0" u="none" strike="noStrike" cap="none" dirty="0">
+                <a:solidFill>
+                  <a:srgbClr val="000000"/>
+                </a:solidFill>
+                <a:latin typeface="Economica"/>
+                <a:ea typeface="Economica"/>
+                <a:cs typeface="Economica"/>
+                <a:sym typeface="Economica"/>
+              </a:rPr>
+              <a:t> item </a:t>
+            </a:r>
+            <a:r>
+              <a:rPr lang="en-GB" sz="1400" b="0" i="0" u="none" strike="noStrike" cap="none" dirty="0" err="1">
+                <a:solidFill>
+                  <a:srgbClr val="000000"/>
+                </a:solidFill>
+                <a:latin typeface="Economica"/>
+                <a:ea typeface="Economica"/>
+                <a:cs typeface="Economica"/>
+                <a:sym typeface="Economica"/>
+              </a:rPr>
+              <a:t>coincé</a:t>
+            </a:r>
+            <a:r>
+              <a:rPr lang="en-GB" sz="1400" b="0" i="0" u="none" strike="noStrike" cap="none" dirty="0">
+                <a:solidFill>
+                  <a:srgbClr val="000000"/>
+                </a:solidFill>
+                <a:latin typeface="Economica"/>
+                <a:ea typeface="Economica"/>
+                <a:cs typeface="Economica"/>
+                <a:sym typeface="Economica"/>
+              </a:rPr>
+              <a:t> dans la vase</a:t>
+            </a:r>
+            <a:endParaRPr lang="en-GB" dirty="0">
               <a:latin typeface="Economica"/>
               <a:ea typeface="Economica"/>
               <a:cs typeface="Economica"/>
@@ -11934,99 +12105,7 @@
               <a:buFont typeface="Economica"/>
               <a:buChar char="●"/>
             </a:pPr>
-            <a:r>
-              <a:rPr lang="en-GB" sz="1400" b="0" i="0" u="none" strike="noStrike" cap="none">
-                <a:solidFill>
-                  <a:srgbClr val="000000"/>
-                </a:solidFill>
-                <a:latin typeface="Economica"/>
-                <a:ea typeface="Economica"/>
-                <a:cs typeface="Economica"/>
-                <a:sym typeface="Economica"/>
-              </a:rPr>
-              <a:t>Viser</a:t>
-            </a:r>
-            <a:endParaRPr sz="1400" b="0" i="0" u="none" strike="noStrike" cap="none">
-              <a:solidFill>
-                <a:srgbClr val="000000"/>
-              </a:solidFill>
-              <a:latin typeface="Economica"/>
-              <a:ea typeface="Economica"/>
-              <a:cs typeface="Economica"/>
-              <a:sym typeface="Economica"/>
-            </a:endParaRPr>
-          </a:p>
-          <a:p>
-            <a:pPr marL="457200" marR="0" lvl="0" indent="-317500" algn="l" rtl="0">
-              <a:lnSpc>
-                <a:spcPct val="100000"/>
-              </a:lnSpc>
-              <a:spcBef>
-                <a:spcPts val="0"/>
-              </a:spcBef>
-              <a:spcAft>
-                <a:spcPts val="0"/>
-              </a:spcAft>
-              <a:buClr>
-                <a:srgbClr val="000000"/>
-              </a:buClr>
-              <a:buSzPts val="1400"/>
-              <a:buFont typeface="Economica"/>
-              <a:buChar char="●"/>
-            </a:pPr>
-            <a:r>
-              <a:rPr lang="en-GB" sz="1400" b="0" i="0" u="none" strike="noStrike" cap="none">
-                <a:solidFill>
-                  <a:srgbClr val="000000"/>
-                </a:solidFill>
-                <a:latin typeface="Economica"/>
-                <a:ea typeface="Economica"/>
-                <a:cs typeface="Economica"/>
-                <a:sym typeface="Economica"/>
-              </a:rPr>
-              <a:t>Sauter</a:t>
-            </a:r>
-            <a:endParaRPr sz="1400" b="0" i="0" u="none" strike="noStrike" cap="none">
-              <a:solidFill>
-                <a:srgbClr val="000000"/>
-              </a:solidFill>
-              <a:latin typeface="Economica"/>
-              <a:ea typeface="Economica"/>
-              <a:cs typeface="Economica"/>
-              <a:sym typeface="Economica"/>
-            </a:endParaRPr>
-          </a:p>
-          <a:p>
-            <a:pPr marL="457200" marR="0" lvl="0" indent="-317500" algn="l" rtl="0">
-              <a:lnSpc>
-                <a:spcPct val="100000"/>
-              </a:lnSpc>
-              <a:spcBef>
-                <a:spcPts val="0"/>
-              </a:spcBef>
-              <a:spcAft>
-                <a:spcPts val="0"/>
-              </a:spcAft>
-              <a:buClr>
-                <a:srgbClr val="000000"/>
-              </a:buClr>
-              <a:buSzPts val="1400"/>
-              <a:buFont typeface="Economica"/>
-              <a:buChar char="●"/>
-            </a:pPr>
-            <a:r>
-              <a:rPr lang="en-GB" sz="1400" b="0" i="0" u="none" strike="noStrike" cap="none">
-                <a:solidFill>
-                  <a:srgbClr val="000000"/>
-                </a:solidFill>
-                <a:latin typeface="Economica"/>
-                <a:ea typeface="Economica"/>
-                <a:cs typeface="Economica"/>
-                <a:sym typeface="Economica"/>
-              </a:rPr>
-              <a:t>etc.</a:t>
-            </a:r>
-            <a:endParaRPr sz="1400" b="0" i="0" u="none" strike="noStrike" cap="none">
+            <a:endParaRPr sz="1400" b="0" i="0" u="none" strike="noStrike" cap="none" dirty="0">
               <a:solidFill>
                 <a:srgbClr val="000000"/>
               </a:solidFill>
@@ -12038,6 +12117,36 @@
           </a:p>
         </p:txBody>
       </p:sp>
+      <p:pic>
+        <p:nvPicPr>
+          <p:cNvPr id="3" name="Image 2">
+            <a:extLst>
+              <a:ext uri="{FF2B5EF4-FFF2-40B4-BE49-F238E27FC236}">
+                <a16:creationId xmlns:a16="http://schemas.microsoft.com/office/drawing/2014/main" id="{52B8AE71-35E4-B0D3-A912-34027C9F751A}"/>
+              </a:ext>
+            </a:extLst>
+          </p:cNvPr>
+          <p:cNvPicPr>
+            <a:picLocks noChangeAspect="1"/>
+          </p:cNvPicPr>
+          <p:nvPr/>
+        </p:nvPicPr>
+        <p:blipFill>
+          <a:blip r:embed="rId3"/>
+          <a:stretch>
+            <a:fillRect/>
+          </a:stretch>
+        </p:blipFill>
+        <p:spPr>
+          <a:xfrm>
+            <a:off x="416640" y="1698522"/>
+            <a:ext cx="1771897" cy="1467055"/>
+          </a:xfrm>
+          <a:prstGeom prst="rect">
+            <a:avLst/>
+          </a:prstGeom>
+        </p:spPr>
+      </p:pic>
     </p:spTree>
   </p:cSld>
   <p:clrMapOvr>
@@ -12115,120 +12224,6 @@
       </p:sp>
       <p:sp>
         <p:nvSpPr>
-          <p:cNvPr id="124" name="Google Shape;124;p10"/>
-          <p:cNvSpPr/>
-          <p:nvPr/>
-        </p:nvSpPr>
-        <p:spPr>
-          <a:xfrm>
-            <a:off x="384825" y="1161925"/>
-            <a:ext cx="1916700" cy="3693000"/>
-          </a:xfrm>
-          <a:prstGeom prst="rect">
-            <a:avLst/>
-          </a:prstGeom>
-          <a:solidFill>
-            <a:srgbClr val="FFFFFF"/>
-          </a:solidFill>
-          <a:ln w="9525" cap="flat" cmpd="sng">
-            <a:solidFill>
-              <a:schemeClr val="dk2"/>
-            </a:solidFill>
-            <a:prstDash val="solid"/>
-            <a:round/>
-            <a:headEnd type="none" w="sm" len="sm"/>
-            <a:tailEnd type="none" w="sm" len="sm"/>
-          </a:ln>
-        </p:spPr>
-        <p:txBody>
-          <a:bodyPr spcFirstLastPara="1" wrap="square" lIns="91425" tIns="91425" rIns="91425" bIns="91425" anchor="ctr" anchorCtr="0">
-            <a:noAutofit/>
-          </a:bodyPr>
-          <a:lstStyle/>
-          <a:p>
-            <a:pPr marL="0" marR="0" lvl="0" indent="0" algn="l" rtl="0">
-              <a:lnSpc>
-                <a:spcPct val="100000"/>
-              </a:lnSpc>
-              <a:spcBef>
-                <a:spcPts val="0"/>
-              </a:spcBef>
-              <a:spcAft>
-                <a:spcPts val="0"/>
-              </a:spcAft>
-              <a:buClr>
-                <a:srgbClr val="000000"/>
-              </a:buClr>
-              <a:buSzPts val="1400"/>
-              <a:buFont typeface="Arial"/>
-              <a:buNone/>
-            </a:pPr>
-            <a:r>
-              <a:rPr lang="en-GB" sz="1400" b="0" i="0" u="none" strike="noStrike" cap="none">
-                <a:solidFill>
-                  <a:srgbClr val="000000"/>
-                </a:solidFill>
-                <a:latin typeface="Economica"/>
-                <a:ea typeface="Economica"/>
-                <a:cs typeface="Economica"/>
-                <a:sym typeface="Economica"/>
-              </a:rPr>
-              <a:t>Image de mon perso</a:t>
-            </a:r>
-            <a:endParaRPr sz="1400" b="0" i="0" u="none" strike="noStrike" cap="none">
-              <a:solidFill>
-                <a:srgbClr val="000000"/>
-              </a:solidFill>
-              <a:latin typeface="Economica"/>
-              <a:ea typeface="Economica"/>
-              <a:cs typeface="Economica"/>
-              <a:sym typeface="Economica"/>
-            </a:endParaRPr>
-          </a:p>
-          <a:p>
-            <a:pPr marL="0" marR="0" lvl="0" indent="0" algn="l" rtl="0">
-              <a:lnSpc>
-                <a:spcPct val="100000"/>
-              </a:lnSpc>
-              <a:spcBef>
-                <a:spcPts val="0"/>
-              </a:spcBef>
-              <a:spcAft>
-                <a:spcPts val="0"/>
-              </a:spcAft>
-              <a:buClr>
-                <a:srgbClr val="000000"/>
-              </a:buClr>
-              <a:buSzPts val="1400"/>
-              <a:buFont typeface="Arial"/>
-              <a:buNone/>
-            </a:pPr>
-            <a:r>
-              <a:rPr lang="en-GB" sz="1400" b="0" i="0" u="none" strike="noStrike" cap="none">
-                <a:solidFill>
-                  <a:srgbClr val="000000"/>
-                </a:solidFill>
-                <a:latin typeface="Economica"/>
-                <a:ea typeface="Economica"/>
-                <a:cs typeface="Economica"/>
-                <a:sym typeface="Economica"/>
-              </a:rPr>
-              <a:t>Ou inspiration de</a:t>
-            </a:r>
-            <a:endParaRPr sz="1400" b="0" i="0" u="none" strike="noStrike" cap="none">
-              <a:solidFill>
-                <a:srgbClr val="000000"/>
-              </a:solidFill>
-              <a:latin typeface="Economica"/>
-              <a:ea typeface="Economica"/>
-              <a:cs typeface="Economica"/>
-              <a:sym typeface="Economica"/>
-            </a:endParaRPr>
-          </a:p>
-        </p:txBody>
-      </p:sp>
-      <p:sp>
-        <p:nvSpPr>
           <p:cNvPr id="125" name="Google Shape;125;p10"/>
           <p:cNvSpPr txBox="1"/>
           <p:nvPr/>
@@ -12269,7 +12264,7 @@
               <a:buFont typeface="Arial"/>
               <a:buNone/>
             </a:pPr>
-            <a:endParaRPr sz="1400" b="0" i="0" u="none" strike="noStrike" cap="none">
+            <a:endParaRPr sz="1400" b="0" i="0" u="none" strike="noStrike" cap="none" dirty="0">
               <a:solidFill>
                 <a:srgbClr val="000000"/>
               </a:solidFill>
@@ -12297,7 +12292,7 @@
               <a:buFont typeface="Arial"/>
               <a:buNone/>
             </a:pPr>
-            <a:endParaRPr sz="1400" b="0" i="0" u="none" strike="noStrike" cap="none">
+            <a:endParaRPr sz="1400" b="0" i="0" u="none" strike="noStrike" cap="none" dirty="0">
               <a:solidFill>
                 <a:srgbClr val="000000"/>
               </a:solidFill>
@@ -12326,7 +12321,7 @@
               <a:buNone/>
             </a:pPr>
             <a:r>
-              <a:rPr lang="en-GB" sz="1400" b="0" i="0" u="none" strike="noStrike" cap="none">
+              <a:rPr lang="en-GB" sz="1400" b="0" i="0" u="none" strike="noStrike" cap="none" dirty="0" err="1">
                 <a:solidFill>
                   <a:srgbClr val="000000"/>
                 </a:solidFill>
@@ -12337,7 +12332,7 @@
               </a:rPr>
               <a:t>Personnalité</a:t>
             </a:r>
-            <a:endParaRPr sz="1400" b="0" i="0" u="none" strike="noStrike" cap="none">
+            <a:endParaRPr sz="1400" b="0" i="0" u="none" strike="noStrike" cap="none" dirty="0">
               <a:solidFill>
                 <a:srgbClr val="000000"/>
               </a:solidFill>
@@ -12366,7 +12361,7 @@
               <a:buChar char="●"/>
             </a:pPr>
             <a:r>
-              <a:rPr lang="en-GB" sz="1400" b="0" i="0" u="none" strike="noStrike" cap="none">
+              <a:rPr lang="fr-FR" sz="1400" b="0" i="0" u="none" strike="noStrike" cap="none" dirty="0">
                 <a:solidFill>
                   <a:srgbClr val="000000"/>
                 </a:solidFill>
@@ -12375,9 +12370,18 @@
                 <a:cs typeface="Economica"/>
                 <a:sym typeface="Economica"/>
               </a:rPr>
-              <a:t>Petite description, pas un roman</a:t>
-            </a:r>
-            <a:endParaRPr sz="1400" b="0" i="0" u="none" strike="noStrike" cap="none">
+              <a:t>Louis est cupide et vénal. Il n’a d’intérêt que pour l’argent. </a:t>
+            </a:r>
+            <a:r>
+              <a:rPr lang="fr-FR" dirty="0">
+                <a:latin typeface="Economica"/>
+                <a:ea typeface="Economica"/>
+                <a:cs typeface="Economica"/>
+                <a:sym typeface="Economica"/>
+              </a:rPr>
+              <a:t>Tout ce qu’il ramasse a une valeur financière. </a:t>
+            </a:r>
+            <a:endParaRPr sz="1400" b="0" i="0" u="none" strike="noStrike" cap="none" dirty="0">
               <a:solidFill>
                 <a:srgbClr val="000000"/>
               </a:solidFill>
@@ -12405,7 +12409,7 @@
               <a:buFont typeface="Arial"/>
               <a:buNone/>
             </a:pPr>
-            <a:endParaRPr sz="1400" b="0" i="0" u="none" strike="noStrike" cap="none">
+            <a:endParaRPr sz="1400" b="0" i="0" u="none" strike="noStrike" cap="none" dirty="0">
               <a:solidFill>
                 <a:srgbClr val="000000"/>
               </a:solidFill>
@@ -12433,7 +12437,7 @@
               <a:buFont typeface="Arial"/>
               <a:buNone/>
             </a:pPr>
-            <a:endParaRPr sz="1400" b="0" i="0" u="none" strike="noStrike" cap="none">
+            <a:endParaRPr sz="1400" b="0" i="0" u="none" strike="noStrike" cap="none" dirty="0">
               <a:solidFill>
                 <a:srgbClr val="000000"/>
               </a:solidFill>
@@ -12462,7 +12466,7 @@
               <a:buNone/>
             </a:pPr>
             <a:r>
-              <a:rPr lang="en-GB" sz="1400" b="0" i="0" u="none" strike="noStrike" cap="none">
+              <a:rPr lang="en-GB" sz="1400" b="0" i="0" u="none" strike="noStrike" cap="none" dirty="0">
                 <a:solidFill>
                   <a:srgbClr val="000000"/>
                 </a:solidFill>
@@ -12473,7 +12477,7 @@
               </a:rPr>
               <a:t> </a:t>
             </a:r>
-            <a:endParaRPr sz="1400" b="0" i="0" u="none" strike="noStrike" cap="none">
+            <a:endParaRPr sz="1400" b="0" i="0" u="none" strike="noStrike" cap="none" dirty="0">
               <a:solidFill>
                 <a:srgbClr val="000000"/>
               </a:solidFill>
@@ -12502,7 +12506,7 @@
               <a:buNone/>
             </a:pPr>
             <a:r>
-              <a:rPr lang="en-GB" sz="1400" b="0" i="0" u="none" strike="noStrike" cap="none">
+              <a:rPr lang="en-GB" sz="1400" b="0" i="0" u="none" strike="noStrike" cap="none" dirty="0">
                 <a:solidFill>
                   <a:srgbClr val="000000"/>
                 </a:solidFill>
@@ -12511,9 +12515,33 @@
                 <a:cs typeface="Economica"/>
                 <a:sym typeface="Economica"/>
               </a:rPr>
-              <a:t>Taille (métrique)</a:t>
-            </a:r>
-            <a:endParaRPr sz="1400" b="0" i="0" u="none" strike="noStrike" cap="none">
+              <a:t>Taille (</a:t>
+            </a:r>
+            <a:r>
+              <a:rPr lang="en-GB" sz="1400" b="0" i="0" u="none" strike="noStrike" cap="none" dirty="0" err="1">
+                <a:solidFill>
+                  <a:srgbClr val="000000"/>
+                </a:solidFill>
+                <a:latin typeface="Economica"/>
+                <a:ea typeface="Economica"/>
+                <a:cs typeface="Economica"/>
+                <a:sym typeface="Economica"/>
+              </a:rPr>
+              <a:t>métrique</a:t>
+            </a:r>
+            <a:r>
+              <a:rPr lang="en-GB" sz="1400" b="0" i="0" u="none" strike="noStrike" cap="none" dirty="0">
+                <a:solidFill>
+                  <a:srgbClr val="000000"/>
+                </a:solidFill>
+                <a:latin typeface="Economica"/>
+                <a:ea typeface="Economica"/>
+                <a:cs typeface="Economica"/>
+                <a:sym typeface="Economica"/>
+              </a:rPr>
+              <a:t>)</a:t>
+            </a:r>
+            <a:endParaRPr sz="1400" b="0" i="0" u="none" strike="noStrike" cap="none" dirty="0">
               <a:solidFill>
                 <a:srgbClr val="000000"/>
               </a:solidFill>
@@ -12542,7 +12570,7 @@
               <a:buChar char="●"/>
             </a:pPr>
             <a:r>
-              <a:rPr lang="en-GB" sz="1400" b="0" i="0" u="none" strike="noStrike" cap="none">
+              <a:rPr lang="fr-FR" sz="1400" b="0" i="0" u="none" strike="noStrike" cap="none" dirty="0">
                 <a:solidFill>
                   <a:srgbClr val="000000"/>
                 </a:solidFill>
@@ -12551,9 +12579,57 @@
                 <a:cs typeface="Economica"/>
                 <a:sym typeface="Economica"/>
               </a:rPr>
-              <a:t>2 units de haut 1 unit de large</a:t>
-            </a:r>
-            <a:endParaRPr sz="1400" b="0" i="0" u="none" strike="noStrike" cap="none">
+              <a:t>3 </a:t>
+            </a:r>
+            <a:r>
+              <a:rPr lang="fr-FR" sz="1400" b="0" i="0" u="none" strike="noStrike" cap="none" dirty="0" err="1">
+                <a:solidFill>
+                  <a:srgbClr val="000000"/>
+                </a:solidFill>
+                <a:latin typeface="Economica"/>
+                <a:ea typeface="Economica"/>
+                <a:cs typeface="Economica"/>
+                <a:sym typeface="Economica"/>
+              </a:rPr>
+              <a:t>units</a:t>
+            </a:r>
+            <a:r>
+              <a:rPr lang="fr-FR" sz="1400" b="0" i="0" u="none" strike="noStrike" cap="none" dirty="0">
+                <a:solidFill>
+                  <a:srgbClr val="000000"/>
+                </a:solidFill>
+                <a:latin typeface="Economica"/>
+                <a:ea typeface="Economica"/>
+                <a:cs typeface="Economica"/>
+                <a:sym typeface="Economica"/>
+              </a:rPr>
+              <a:t> de long et 1 </a:t>
+            </a:r>
+            <a:r>
+              <a:rPr lang="fr-FR" sz="1400" b="0" i="0" u="none" strike="noStrike" cap="none" dirty="0" err="1">
+                <a:solidFill>
+                  <a:srgbClr val="000000"/>
+                </a:solidFill>
+                <a:latin typeface="Economica"/>
+                <a:ea typeface="Economica"/>
+                <a:cs typeface="Economica"/>
+                <a:sym typeface="Economica"/>
+              </a:rPr>
+              <a:t>units</a:t>
+            </a:r>
+            <a:r>
+              <a:rPr lang="fr-FR" sz="1400" b="0" i="0" u="none" strike="noStrike" cap="none" dirty="0">
+                <a:solidFill>
+                  <a:srgbClr val="000000"/>
+                </a:solidFill>
+                <a:latin typeface="Economica"/>
+                <a:ea typeface="Economica"/>
+                <a:cs typeface="Economica"/>
+                <a:sym typeface="Economica"/>
+              </a:rPr>
+              <a:t> de hauteur</a:t>
+            </a:r>
+            <a:endParaRPr sz="1400" b="0" i="0" u="none" strike="noStrike" cap="none" dirty="0">
               <a:solidFill>
                 <a:srgbClr val="000000"/>
               </a:solidFill>
@@ -12582,7 +12658,7 @@
               <a:buChar char="●"/>
             </a:pPr>
             <a:r>
-              <a:rPr lang="en-GB" sz="1400" b="0" i="0" u="none" strike="noStrike" cap="none">
+              <a:rPr lang="fr-FR" sz="1400" b="0" i="0" u="none" strike="noStrike" cap="none" dirty="0">
                 <a:solidFill>
                   <a:srgbClr val="000000"/>
                 </a:solidFill>
@@ -12591,9 +12667,21 @@
                 <a:cs typeface="Economica"/>
                 <a:sym typeface="Economica"/>
               </a:rPr>
-              <a:t>Portée épée 3 unités</a:t>
-            </a:r>
-            <a:endParaRPr sz="1400" b="0" i="0" u="none" strike="noStrike" cap="none">
+              <a:t>Porte une </a:t>
+            </a:r>
+            <a:r>
+              <a:rPr lang="fr-FR" sz="1400" b="0" i="0" u="none" strike="noStrike" cap="none">
+                <a:solidFill>
+                  <a:srgbClr val="000000"/>
+                </a:solidFill>
+                <a:latin typeface="Economica"/>
+                <a:ea typeface="Economica"/>
+                <a:cs typeface="Economica"/>
+                <a:sym typeface="Economica"/>
+              </a:rPr>
+              <a:t>bombo</a:t>
+            </a:r>
+            <a:endParaRPr sz="1400" b="0" i="0" u="none" strike="noStrike" cap="none" dirty="0">
               <a:solidFill>
                 <a:srgbClr val="000000"/>
               </a:solidFill>
@@ -12622,7 +12710,7 @@
               <a:buChar char="●"/>
             </a:pPr>
             <a:r>
-              <a:rPr lang="en-GB" sz="1400" b="0" i="0" u="none" strike="noStrike" cap="none">
+              <a:rPr lang="en-GB" sz="1400" b="0" i="0" u="none" strike="noStrike" cap="none" dirty="0" err="1">
                 <a:solidFill>
                   <a:srgbClr val="000000"/>
                 </a:solidFill>
@@ -12631,9 +12719,33 @@
                 <a:cs typeface="Economica"/>
                 <a:sym typeface="Economica"/>
               </a:rPr>
-              <a:t>Portée Bazooka 35 unités</a:t>
-            </a:r>
-            <a:endParaRPr sz="1400" b="0" i="0" u="none" strike="noStrike" cap="none">
+              <a:t>Portée</a:t>
+            </a:r>
+            <a:r>
+              <a:rPr lang="en-GB" sz="1400" b="0" i="0" u="none" strike="noStrike" cap="none" dirty="0">
+                <a:solidFill>
+                  <a:srgbClr val="000000"/>
+                </a:solidFill>
+                <a:latin typeface="Economica"/>
+                <a:ea typeface="Economica"/>
+                <a:cs typeface="Economica"/>
+                <a:sym typeface="Economica"/>
+              </a:rPr>
+              <a:t> Bazooka 35 </a:t>
+            </a:r>
+            <a:r>
+              <a:rPr lang="en-GB" sz="1400" b="0" i="0" u="none" strike="noStrike" cap="none" dirty="0" err="1">
+                <a:solidFill>
+                  <a:srgbClr val="000000"/>
+                </a:solidFill>
+                <a:latin typeface="Economica"/>
+                <a:ea typeface="Economica"/>
+                <a:cs typeface="Economica"/>
+                <a:sym typeface="Economica"/>
+              </a:rPr>
+              <a:t>unités</a:t>
+            </a:r>
+            <a:endParaRPr sz="1400" b="0" i="0" u="none" strike="noStrike" cap="none" dirty="0">
               <a:solidFill>
                 <a:srgbClr val="000000"/>
               </a:solidFill>
@@ -12662,7 +12774,7 @@
               <a:buChar char="●"/>
             </a:pPr>
             <a:r>
-              <a:rPr lang="en-GB" sz="1400" b="0" i="0" u="none" strike="noStrike" cap="none">
+              <a:rPr lang="en-GB" sz="1400" b="0" i="0" u="none" strike="noStrike" cap="none" dirty="0">
                 <a:solidFill>
                   <a:srgbClr val="000000"/>
                 </a:solidFill>
@@ -12673,7 +12785,7 @@
               </a:rPr>
               <a:t>etc.</a:t>
             </a:r>
-            <a:endParaRPr sz="1400" b="0" i="0" u="none" strike="noStrike" cap="none">
+            <a:endParaRPr sz="1400" b="0" i="0" u="none" strike="noStrike" cap="none" dirty="0">
               <a:solidFill>
                 <a:srgbClr val="000000"/>
               </a:solidFill>
@@ -12701,7 +12813,7 @@
               <a:buFont typeface="Arial"/>
               <a:buNone/>
             </a:pPr>
-            <a:endParaRPr sz="1400" b="0" i="0" u="none" strike="noStrike" cap="none">
+            <a:endParaRPr sz="1400" b="0" i="0" u="none" strike="noStrike" cap="none" dirty="0">
               <a:solidFill>
                 <a:srgbClr val="000000"/>
               </a:solidFill>
@@ -12729,7 +12841,7 @@
               <a:buFont typeface="Arial"/>
               <a:buNone/>
             </a:pPr>
-            <a:endParaRPr sz="1400" b="0" i="0" u="none" strike="noStrike" cap="none">
+            <a:endParaRPr sz="1400" b="0" i="0" u="none" strike="noStrike" cap="none" dirty="0">
               <a:solidFill>
                 <a:srgbClr val="000000"/>
               </a:solidFill>
@@ -12741,6 +12853,36 @@
           </a:p>
         </p:txBody>
       </p:sp>
+      <p:pic>
+        <p:nvPicPr>
+          <p:cNvPr id="2" name="Image 1">
+            <a:extLst>
+              <a:ext uri="{FF2B5EF4-FFF2-40B4-BE49-F238E27FC236}">
+                <a16:creationId xmlns:a16="http://schemas.microsoft.com/office/drawing/2014/main" id="{D3AA7816-F51B-BC5A-13DA-E5D506154BB4}"/>
+              </a:ext>
+            </a:extLst>
+          </p:cNvPr>
+          <p:cNvPicPr>
+            <a:picLocks noChangeAspect="1"/>
+          </p:cNvPicPr>
+          <p:nvPr/>
+        </p:nvPicPr>
+        <p:blipFill>
+          <a:blip r:embed="rId3"/>
+          <a:stretch>
+            <a:fillRect/>
+          </a:stretch>
+        </p:blipFill>
+        <p:spPr>
+          <a:xfrm>
+            <a:off x="416640" y="1698522"/>
+            <a:ext cx="1771897" cy="1467055"/>
+          </a:xfrm>
+          <a:prstGeom prst="rect">
+            <a:avLst/>
+          </a:prstGeom>
+        </p:spPr>
+      </p:pic>
     </p:spTree>
   </p:cSld>
   <p:clrMapOvr>
